--- a/icbb-website/materials/research-methods/unit-09-slides.pptx
+++ b/icbb-website/materials/research-methods/unit-09-slides.pptx
@@ -1146,7 +1146,7 @@
           <a:p>
             <a:r>
               <a:rPr lang="en-US" dirty="0"/>
-              <a:t>Take-away: Whenever the researcher can affect the participant's grades, treatment or employment, address it in the design. Saying "participation was voluntary" does not make it so.</a:t>
+              <a:t>The point: Whenever the researcher can affect the participant's grades, treatment or employment, address it in the design. Saying "participation was voluntary" does not make it so.</a:t>
             </a:r>
             <a:endParaRPr lang="en-US" dirty="0"/>
           </a:p>
@@ -1234,7 +1234,7 @@
           <a:p>
             <a:r>
               <a:rPr lang="en-US" dirty="0"/>
-              <a:t>Take-away: Anonymisation means removing what identifies, not just removing names. Read every quotation as someone in that workplace would read it.</a:t>
+              <a:t>The point: Anonymisation means removing what identifies, not just removing names. Read every quotation as someone in that workplace would read it.</a:t>
             </a:r>
             <a:endParaRPr lang="en-US" dirty="0"/>
           </a:p>
@@ -1498,7 +1498,7 @@
           <a:p>
             <a:r>
               <a:rPr lang="en-US" dirty="0"/>
-              <a:t>Read these out at the start and return to them at the end of the unit.</a:t>
+              <a:t>Read these at the start, and return to them at the end of the unit.</a:t>
             </a:r>
             <a:endParaRPr lang="en-US" dirty="0"/>
           </a:p>
@@ -2306,14 +2306,14 @@
         </p:nvSpPr>
         <p:spPr>
           <a:xfrm>
-            <a:off x="0" y="0"/>
-            <a:ext cx="118872" cy="5148072"/>
+            <a:off x="566928" y="4590288"/>
+            <a:ext cx="8010144" cy="10973"/>
           </a:xfrm>
           <a:prstGeom prst="rect">
             <a:avLst/>
           </a:prstGeom>
           <a:solidFill>
-            <a:srgbClr val="0066CC"/>
+            <a:srgbClr val="D8D3CB"/>
           </a:solidFill>
           <a:ln/>
         </p:spPr>
@@ -2328,7 +2328,7 @@
         </p:nvPicPr>
         <p:blipFill>
           <a:blip r:embed="rId1">
-            <a:alphaModFix amt="18000"/>
+            <a:alphaModFix amt="38000"/>
           </a:blip>
           <a:stretch>
             <a:fillRect/>
@@ -2336,8 +2336,8 @@
         </p:blipFill>
         <p:spPr>
           <a:xfrm>
-            <a:off x="6903720" y="3977640"/>
-            <a:ext cx="1920240" cy="1280160"/>
+            <a:off x="7973568" y="4709160"/>
+            <a:ext cx="566928" cy="374904"/>
           </a:xfrm>
           <a:prstGeom prst="rect">
             <a:avLst/>
@@ -2356,8 +2356,8 @@
         </p:nvSpPr>
         <p:spPr>
           <a:xfrm>
-            <a:off x="8503920" y="4709160"/>
-            <a:ext cx="800000" cy="300000"/>
+            <a:off x="566928" y="4700016"/>
+            <a:ext cx="914400" cy="274320"/>
           </a:xfrm>
           <a:prstGeom prst="rect">
             <a:avLst/>
@@ -2372,10 +2372,13 @@
           <a:bodyPr/>
           <a:lstStyle>
             <a:lvl1pPr>
-              <a:defRPr sz="1000">
-                <a:solidFill>
-                  <a:srgbClr val="6B7280"/>
-                </a:solidFill>
+              <a:defRPr sz="900">
+                <a:solidFill>
+                  <a:srgbClr val="5F6B76"/>
+                </a:solidFill>
+                <a:latin typeface="Corbel"/>
+                <a:ea typeface="Corbel"/>
+                <a:cs typeface="Corbel"/>
               </a:defRPr>
             </a:lvl1pPr>
           </a:lstStyle>
@@ -2403,7 +2406,7 @@
     <p:bg>
       <p:bgPr>
         <a:solidFill>
-          <a:srgbClr val="004D99"/>
+          <a:srgbClr val="132330"/>
         </a:solidFill>
       </p:bgPr>
     </p:bg>
@@ -2429,14 +2432,14 @@
         </p:nvSpPr>
         <p:spPr>
           <a:xfrm>
-            <a:off x="0" y="4526280"/>
-            <a:ext cx="9144000" cy="621792"/>
+            <a:off x="685800" y="1481328"/>
+            <a:ext cx="1051560" cy="25603"/>
           </a:xfrm>
           <a:prstGeom prst="rect">
             <a:avLst/>
           </a:prstGeom>
           <a:solidFill>
-            <a:srgbClr val="00A86B"/>
+            <a:srgbClr val="9A6A3C"/>
           </a:solidFill>
           <a:ln/>
         </p:spPr>
@@ -2451,7 +2454,7 @@
         </p:nvPicPr>
         <p:blipFill>
           <a:blip r:embed="rId1">
-            <a:alphaModFix amt="75000"/>
+            <a:alphaModFix amt="45000"/>
           </a:blip>
           <a:stretch>
             <a:fillRect/>
@@ -2459,8 +2462,8 @@
         </p:blipFill>
         <p:spPr>
           <a:xfrm>
-            <a:off x="7452360" y="384048"/>
-            <a:ext cx="1371600" cy="914400"/>
+            <a:off x="7863840" y="4315968"/>
+            <a:ext cx="676656" cy="448056"/>
           </a:xfrm>
           <a:prstGeom prst="rect">
             <a:avLst/>
@@ -2504,8 +2507,8 @@
         </p:nvSpPr>
         <p:spPr>
           <a:xfrm>
-            <a:off x="8503920" y="4709160"/>
-            <a:ext cx="800000" cy="300000"/>
+            <a:off x="566928" y="4700016"/>
+            <a:ext cx="914400" cy="274320"/>
           </a:xfrm>
           <a:prstGeom prst="rect">
             <a:avLst/>
@@ -2520,10 +2523,13 @@
           <a:bodyPr/>
           <a:lstStyle>
             <a:lvl1pPr>
-              <a:defRPr sz="1000">
-                <a:solidFill>
-                  <a:srgbClr val="6B7280"/>
-                </a:solidFill>
+              <a:defRPr sz="900">
+                <a:solidFill>
+                  <a:srgbClr val="5F6B76"/>
+                </a:solidFill>
+                <a:latin typeface="Corbel"/>
+                <a:ea typeface="Corbel"/>
+                <a:cs typeface="Corbel"/>
               </a:defRPr>
             </a:lvl1pPr>
           </a:lstStyle>
@@ -2824,8 +2830,8 @@
         </p:nvSpPr>
         <p:spPr>
           <a:xfrm>
-            <a:off x="548640" y="1005840"/>
-            <a:ext cx="6675120" cy="274320"/>
+            <a:off x="685800" y="1024128"/>
+            <a:ext cx="6766560" cy="292608"/>
           </a:xfrm>
           <a:prstGeom prst="rect">
             <a:avLst/>
@@ -2841,14 +2847,17 @@
               <a:buNone/>
             </a:pPr>
             <a:r>
-              <a:rPr lang="en-US" sz="1200" b="1" spc="200" kern="0" dirty="0">
-                <a:solidFill>
-                  <a:srgbClr val="00A86B"/>
-                </a:solidFill>
-              </a:rPr>
-              <a:t>ICBB-RM101  ·  UNIT 9 OF 10</a:t>
-            </a:r>
-            <a:endParaRPr lang="en-US" sz="1200" dirty="0"/>
+              <a:rPr lang="en-US" sz="1150" spc="240" kern="0" dirty="0">
+                <a:solidFill>
+                  <a:srgbClr val="C8A67B"/>
+                </a:solidFill>
+                <a:latin typeface="Corbel" pitchFamily="34" charset="0"/>
+                <a:ea typeface="Corbel" pitchFamily="34" charset="-122"/>
+                <a:cs typeface="Corbel" pitchFamily="34" charset="-120"/>
+              </a:rPr>
+              <a:t>ICBB-RM101   ·   Unit 9 of 10</a:t>
+            </a:r>
+            <a:endParaRPr lang="en-US" sz="1150" dirty="0"/>
           </a:p>
         </p:txBody>
       </p:sp>
@@ -2860,8 +2869,8 @@
         </p:nvSpPr>
         <p:spPr>
           <a:xfrm>
-            <a:off x="548640" y="1371600"/>
-            <a:ext cx="6766560" cy="1371600"/>
+            <a:off x="685800" y="1700784"/>
+            <a:ext cx="6858000" cy="1417320"/>
           </a:xfrm>
           <a:prstGeom prst="rect">
             <a:avLst/>
@@ -2874,17 +2883,23 @@
           <a:lstStyle/>
           <a:p>
             <a:pPr indent="0" marL="0">
+              <a:lnSpc>
+                <a:spcPct val="102000"/>
+              </a:lnSpc>
               <a:buNone/>
             </a:pPr>
             <a:r>
-              <a:rPr lang="en-US" sz="3400" b="1" dirty="0">
+              <a:rPr lang="en-US" sz="3300" dirty="0">
                 <a:solidFill>
                   <a:srgbClr val="FFFFFF"/>
                 </a:solidFill>
+                <a:latin typeface="Constantia" pitchFamily="34" charset="0"/>
+                <a:ea typeface="Constantia" pitchFamily="34" charset="-122"/>
+                <a:cs typeface="Constantia" pitchFamily="34" charset="-120"/>
               </a:rPr>
               <a:t>Research Ethics and Integrity</a:t>
             </a:r>
-            <a:endParaRPr lang="en-US" sz="3400" dirty="0"/>
+            <a:endParaRPr lang="en-US" sz="3300" dirty="0"/>
           </a:p>
         </p:txBody>
       </p:sp>
@@ -2896,8 +2911,8 @@
         </p:nvSpPr>
         <p:spPr>
           <a:xfrm>
-            <a:off x="548640" y="2788920"/>
-            <a:ext cx="6766560" cy="1188720"/>
+            <a:off x="685800" y="3127248"/>
+            <a:ext cx="6309360" cy="1051560"/>
           </a:xfrm>
           <a:prstGeom prst="rect">
             <a:avLst/>
@@ -2911,19 +2926,22 @@
           <a:p>
             <a:pPr indent="0" marL="0">
               <a:lnSpc>
-                <a:spcPct val="120000"/>
+                <a:spcPct val="128000"/>
               </a:lnSpc>
               <a:buNone/>
             </a:pPr>
             <a:r>
-              <a:rPr lang="en-US" sz="1400" dirty="0">
-                <a:solidFill>
-                  <a:srgbClr val="DCE7F5"/>
-                </a:solidFill>
+              <a:rPr lang="en-US" sz="1350" dirty="0">
+                <a:solidFill>
+                  <a:srgbClr val="B9C2CB"/>
+                </a:solidFill>
+                <a:latin typeface="Corbel" pitchFamily="34" charset="0"/>
+                <a:ea typeface="Corbel" pitchFamily="34" charset="-122"/>
+                <a:cs typeface="Corbel" pitchFamily="34" charset="-120"/>
               </a:rPr>
               <a:t>The principles governing research with human participants, how ethical review actually works, and the integrity questions — authorship, plagiarism, data fabrication and the use of AI — that decide whether your work stands.</a:t>
             </a:r>
-            <a:endParaRPr lang="en-US" sz="1400" dirty="0"/>
+            <a:endParaRPr lang="en-US" sz="1350" dirty="0"/>
           </a:p>
         </p:txBody>
       </p:sp>
@@ -2935,8 +2953,8 @@
         </p:nvSpPr>
         <p:spPr>
           <a:xfrm>
-            <a:off x="548640" y="4645152"/>
-            <a:ext cx="5486400" cy="365760"/>
+            <a:off x="685800" y="4407408"/>
+            <a:ext cx="4572000" cy="274320"/>
           </a:xfrm>
           <a:prstGeom prst="rect">
             <a:avLst/>
@@ -2952,14 +2970,17 @@
               <a:buNone/>
             </a:pPr>
             <a:r>
-              <a:rPr lang="en-US" sz="1200" b="1" dirty="0">
-                <a:solidFill>
-                  <a:srgbClr val="FFFFFF"/>
-                </a:solidFill>
-              </a:rPr>
-              <a:t>Jesse Anak  ·  ICBB</a:t>
-            </a:r>
-            <a:endParaRPr lang="en-US" sz="1200" dirty="0"/>
+              <a:rPr lang="en-US" sz="1050" spc="120" kern="0" dirty="0">
+                <a:solidFill>
+                  <a:srgbClr val="8894A0"/>
+                </a:solidFill>
+                <a:latin typeface="Corbel" pitchFamily="34" charset="0"/>
+                <a:ea typeface="Corbel" pitchFamily="34" charset="-122"/>
+                <a:cs typeface="Corbel" pitchFamily="34" charset="-120"/>
+              </a:rPr>
+              <a:t>Jesse Anak   ·   ICBB</a:t>
+            </a:r>
+            <a:endParaRPr lang="en-US" sz="1050" dirty="0"/>
           </a:p>
         </p:txBody>
       </p:sp>
@@ -2996,8 +3017,8 @@
         </p:nvSpPr>
         <p:spPr>
           <a:xfrm>
-            <a:off x="502920" y="292608"/>
-            <a:ext cx="8046720" cy="228600"/>
+            <a:off x="566928" y="384048"/>
+            <a:ext cx="7772400" cy="237744"/>
           </a:xfrm>
           <a:prstGeom prst="rect">
             <a:avLst/>
@@ -3013,14 +3034,17 @@
               <a:buNone/>
             </a:pPr>
             <a:r>
-              <a:rPr lang="en-US" sz="1100" b="1" spc="150" kern="0" dirty="0">
-                <a:solidFill>
-                  <a:srgbClr val="0066CC"/>
-                </a:solidFill>
+              <a:rPr lang="en-US" sz="1000" spc="200" kern="0" dirty="0">
+                <a:solidFill>
+                  <a:srgbClr val="9A6A3C"/>
+                </a:solidFill>
+                <a:latin typeface="Corbel" pitchFamily="34" charset="0"/>
+                <a:ea typeface="Corbel" pitchFamily="34" charset="-122"/>
+                <a:cs typeface="Corbel" pitchFamily="34" charset="-120"/>
               </a:rPr>
               <a:t>UNIT 9</a:t>
             </a:r>
-            <a:endParaRPr lang="en-US" sz="1100" dirty="0"/>
+            <a:endParaRPr lang="en-US" sz="1000" dirty="0"/>
           </a:p>
         </p:txBody>
       </p:sp>
@@ -3032,8 +3056,8 @@
         </p:nvSpPr>
         <p:spPr>
           <a:xfrm>
-            <a:off x="502920" y="548640"/>
-            <a:ext cx="8046720" cy="640080"/>
+            <a:off x="566928" y="658368"/>
+            <a:ext cx="7772400" cy="658368"/>
           </a:xfrm>
           <a:prstGeom prst="rect">
             <a:avLst/>
@@ -3046,30 +3070,56 @@
           <a:lstStyle/>
           <a:p>
             <a:pPr indent="0" marL="0">
+              <a:lnSpc>
+                <a:spcPct val="100000"/>
+              </a:lnSpc>
               <a:buNone/>
             </a:pPr>
             <a:r>
-              <a:rPr lang="en-US" sz="2400" b="1" dirty="0">
-                <a:solidFill>
-                  <a:srgbClr val="111827"/>
-                </a:solidFill>
+              <a:rPr lang="en-US" sz="2500" dirty="0">
+                <a:solidFill>
+                  <a:srgbClr val="1C3140"/>
+                </a:solidFill>
+                <a:latin typeface="Constantia" pitchFamily="34" charset="0"/>
+                <a:ea typeface="Constantia" pitchFamily="34" charset="-122"/>
+                <a:cs typeface="Constantia" pitchFamily="34" charset="-120"/>
               </a:rPr>
               <a:t>Review and approval (2/2)</a:t>
             </a:r>
-            <a:endParaRPr lang="en-US" sz="2400" dirty="0"/>
-          </a:p>
-        </p:txBody>
-      </p:sp>
-      <p:sp>
-        <p:nvSpPr>
-          <p:cNvPr id="4" name="Text 2"/>
+            <a:endParaRPr lang="en-US" sz="2500" dirty="0"/>
+          </a:p>
+        </p:txBody>
+      </p:sp>
+      <p:sp>
+        <p:nvSpPr>
+          <p:cNvPr id="4" name="Shape 2"/>
           <p:cNvSpPr/>
           <p:nvPr/>
         </p:nvSpPr>
         <p:spPr>
           <a:xfrm>
-            <a:off x="685800" y="1325880"/>
-            <a:ext cx="7772400" cy="3200400"/>
+            <a:off x="566928" y="1335024"/>
+            <a:ext cx="566928" cy="20117"/>
+          </a:xfrm>
+          <a:prstGeom prst="rect">
+            <a:avLst/>
+          </a:prstGeom>
+          <a:solidFill>
+            <a:srgbClr val="9A6A3C"/>
+          </a:solidFill>
+          <a:ln/>
+        </p:spPr>
+      </p:sp>
+      <p:sp>
+        <p:nvSpPr>
+          <p:cNvPr id="5" name="Text 3"/>
+          <p:cNvSpPr/>
+          <p:nvPr/>
+        </p:nvSpPr>
+        <p:spPr>
+          <a:xfrm>
+            <a:off x="713232" y="1664208"/>
+            <a:ext cx="7498080" cy="2788920"/>
           </a:xfrm>
           <a:prstGeom prst="rect">
             <a:avLst/>
@@ -3083,65 +3133,74 @@
           <a:p>
             <a:pPr marL="342900" indent="-342900">
               <a:lnSpc>
-                <a:spcPct val="125000"/>
+                <a:spcPct val="130000"/>
               </a:lnSpc>
               <a:spcAft>
-                <a:spcPts val="800"/>
+                <a:spcPts val="1100"/>
               </a:spcAft>
               <a:buSzPct val="100000"/>
-              <a:buChar char="•"/>
-            </a:pPr>
-            <a:r>
-              <a:rPr lang="en-US" sz="1300" dirty="0">
-                <a:solidFill>
-                  <a:srgbClr val="374151"/>
-                </a:solidFill>
+              <a:buChar char="–"/>
+            </a:pPr>
+            <a:r>
+              <a:rPr lang="en-US" sz="1350" dirty="0">
+                <a:solidFill>
+                  <a:srgbClr val="23282E"/>
+                </a:solidFill>
+                <a:latin typeface="Corbel" pitchFamily="34" charset="0"/>
+                <a:ea typeface="Corbel" pitchFamily="34" charset="-122"/>
+                <a:cs typeface="Corbel" pitchFamily="34" charset="-120"/>
               </a:rPr>
               <a:t>Committees most often query: unclear risk-benefit, weak consent for vulnerable groups, inadequate data protection, undisclosed conflicts, and underpowered designs</a:t>
             </a:r>
-            <a:endParaRPr lang="en-US" sz="1300" dirty="0"/>
+            <a:endParaRPr lang="en-US" sz="1350" dirty="0"/>
           </a:p>
           <a:p>
             <a:pPr marL="342900" indent="-342900">
               <a:lnSpc>
-                <a:spcPct val="125000"/>
+                <a:spcPct val="130000"/>
               </a:lnSpc>
               <a:spcAft>
-                <a:spcPts val="800"/>
+                <a:spcPts val="1100"/>
               </a:spcAft>
               <a:buSzPct val="100000"/>
-              <a:buChar char="•"/>
-            </a:pPr>
-            <a:r>
-              <a:rPr lang="en-US" sz="1300" dirty="0">
-                <a:solidFill>
-                  <a:srgbClr val="374151"/>
-                </a:solidFill>
+              <a:buChar char="–"/>
+            </a:pPr>
+            <a:r>
+              <a:rPr lang="en-US" sz="1350" dirty="0">
+                <a:solidFill>
+                  <a:srgbClr val="23282E"/>
+                </a:solidFill>
+                <a:latin typeface="Corbel" pitchFamily="34" charset="0"/>
+                <a:ea typeface="Corbel" pitchFamily="34" charset="-122"/>
+                <a:cs typeface="Corbel" pitchFamily="34" charset="-120"/>
               </a:rPr>
               <a:t>Approval is time-limited; amendments and extensions must be submitted, and adverse events reported</a:t>
             </a:r>
-            <a:endParaRPr lang="en-US" sz="1300" dirty="0"/>
+            <a:endParaRPr lang="en-US" sz="1350" dirty="0"/>
           </a:p>
           <a:p>
             <a:pPr marL="342900" indent="-342900">
               <a:lnSpc>
-                <a:spcPct val="125000"/>
+                <a:spcPct val="130000"/>
               </a:lnSpc>
               <a:spcAft>
-                <a:spcPts val="800"/>
+                <a:spcPts val="1100"/>
               </a:spcAft>
               <a:buSzPct val="100000"/>
-              <a:buChar char="•"/>
-            </a:pPr>
-            <a:r>
-              <a:rPr lang="en-US" sz="1300" dirty="0">
-                <a:solidFill>
-                  <a:srgbClr val="374151"/>
-                </a:solidFill>
+              <a:buChar char="–"/>
+            </a:pPr>
+            <a:r>
+              <a:rPr lang="en-US" sz="1350" dirty="0">
+                <a:solidFill>
+                  <a:srgbClr val="23282E"/>
+                </a:solidFill>
+                <a:latin typeface="Corbel" pitchFamily="34" charset="0"/>
+                <a:ea typeface="Corbel" pitchFamily="34" charset="-122"/>
+                <a:cs typeface="Corbel" pitchFamily="34" charset="-120"/>
               </a:rPr>
               <a:t>Publishing without approval is a serious breach — many journals require the approval number, and retraction follows if it was never obtained</a:t>
             </a:r>
-            <a:endParaRPr lang="en-US" sz="1300" dirty="0"/>
+            <a:endParaRPr lang="en-US" sz="1350" dirty="0"/>
           </a:p>
         </p:txBody>
       </p:sp>
@@ -3157,8 +3216,8 @@
         </p:nvSpPr>
         <p:spPr>
           <a:xfrm>
-            <a:off x="8503920" y="4709160"/>
-            <a:ext cx="800000" cy="300000"/>
+            <a:off x="566928" y="4700016"/>
+            <a:ext cx="914400" cy="274320"/>
           </a:xfrm>
           <a:prstGeom prst="rect">
             <a:avLst/>
@@ -3173,10 +3232,13 @@
           <a:bodyPr/>
           <a:lstStyle>
             <a:lvl1pPr>
-              <a:defRPr sz="1000">
-                <a:solidFill>
-                  <a:srgbClr val="6B7280"/>
-                </a:solidFill>
+              <a:defRPr sz="900">
+                <a:solidFill>
+                  <a:srgbClr val="5F6B76"/>
+                </a:solidFill>
+                <a:latin typeface="Corbel"/>
+                <a:ea typeface="Corbel"/>
+                <a:cs typeface="Corbel"/>
               </a:defRPr>
             </a:lvl1pPr>
           </a:lstStyle>
@@ -3223,8 +3285,8 @@
         </p:nvSpPr>
         <p:spPr>
           <a:xfrm>
-            <a:off x="502920" y="292608"/>
-            <a:ext cx="8046720" cy="228600"/>
+            <a:off x="566928" y="384048"/>
+            <a:ext cx="7772400" cy="237744"/>
           </a:xfrm>
           <a:prstGeom prst="rect">
             <a:avLst/>
@@ -3240,14 +3302,17 @@
               <a:buNone/>
             </a:pPr>
             <a:r>
-              <a:rPr lang="en-US" sz="1100" b="1" spc="150" kern="0" dirty="0">
-                <a:solidFill>
-                  <a:srgbClr val="0066CC"/>
-                </a:solidFill>
+              <a:rPr lang="en-US" sz="1000" spc="200" kern="0" dirty="0">
+                <a:solidFill>
+                  <a:srgbClr val="9A6A3C"/>
+                </a:solidFill>
+                <a:latin typeface="Corbel" pitchFamily="34" charset="0"/>
+                <a:ea typeface="Corbel" pitchFamily="34" charset="-122"/>
+                <a:cs typeface="Corbel" pitchFamily="34" charset="-120"/>
               </a:rPr>
               <a:t>UNIT 9</a:t>
             </a:r>
-            <a:endParaRPr lang="en-US" sz="1100" dirty="0"/>
+            <a:endParaRPr lang="en-US" sz="1000" dirty="0"/>
           </a:p>
         </p:txBody>
       </p:sp>
@@ -3259,8 +3324,8 @@
         </p:nvSpPr>
         <p:spPr>
           <a:xfrm>
-            <a:off x="502920" y="548640"/>
-            <a:ext cx="8046720" cy="640080"/>
+            <a:off x="566928" y="658368"/>
+            <a:ext cx="7772400" cy="658368"/>
           </a:xfrm>
           <a:prstGeom prst="rect">
             <a:avLst/>
@@ -3273,30 +3338,56 @@
           <a:lstStyle/>
           <a:p>
             <a:pPr indent="0" marL="0">
+              <a:lnSpc>
+                <a:spcPct val="100000"/>
+              </a:lnSpc>
               <a:buNone/>
             </a:pPr>
             <a:r>
-              <a:rPr lang="en-US" sz="2400" b="1" dirty="0">
-                <a:solidFill>
-                  <a:srgbClr val="111827"/>
-                </a:solidFill>
+              <a:rPr lang="en-US" sz="2500" dirty="0">
+                <a:solidFill>
+                  <a:srgbClr val="1C3140"/>
+                </a:solidFill>
+                <a:latin typeface="Constantia" pitchFamily="34" charset="0"/>
+                <a:ea typeface="Constantia" pitchFamily="34" charset="-122"/>
+                <a:cs typeface="Constantia" pitchFamily="34" charset="-120"/>
               </a:rPr>
               <a:t>Confidentiality and data protection (1/2)</a:t>
             </a:r>
-            <a:endParaRPr lang="en-US" sz="2400" dirty="0"/>
-          </a:p>
-        </p:txBody>
-      </p:sp>
-      <p:sp>
-        <p:nvSpPr>
-          <p:cNvPr id="4" name="Text 2"/>
+            <a:endParaRPr lang="en-US" sz="2500" dirty="0"/>
+          </a:p>
+        </p:txBody>
+      </p:sp>
+      <p:sp>
+        <p:nvSpPr>
+          <p:cNvPr id="4" name="Shape 2"/>
           <p:cNvSpPr/>
           <p:nvPr/>
         </p:nvSpPr>
         <p:spPr>
           <a:xfrm>
-            <a:off x="685800" y="1325880"/>
-            <a:ext cx="7772400" cy="3200400"/>
+            <a:off x="566928" y="1335024"/>
+            <a:ext cx="566928" cy="20117"/>
+          </a:xfrm>
+          <a:prstGeom prst="rect">
+            <a:avLst/>
+          </a:prstGeom>
+          <a:solidFill>
+            <a:srgbClr val="9A6A3C"/>
+          </a:solidFill>
+          <a:ln/>
+        </p:spPr>
+      </p:sp>
+      <p:sp>
+        <p:nvSpPr>
+          <p:cNvPr id="5" name="Text 3"/>
+          <p:cNvSpPr/>
+          <p:nvPr/>
+        </p:nvSpPr>
+        <p:spPr>
+          <a:xfrm>
+            <a:off x="713232" y="1664208"/>
+            <a:ext cx="7498080" cy="2788920"/>
           </a:xfrm>
           <a:prstGeom prst="rect">
             <a:avLst/>
@@ -3310,19 +3401,22 @@
           <a:p>
             <a:pPr marL="342900" indent="-342900">
               <a:lnSpc>
-                <a:spcPct val="125000"/>
+                <a:spcPct val="130000"/>
               </a:lnSpc>
               <a:spcAft>
-                <a:spcPts val="800"/>
+                <a:spcPts val="1100"/>
               </a:spcAft>
               <a:buSzPct val="100000"/>
-              <a:buChar char="•"/>
+              <a:buChar char="–"/>
             </a:pPr>
             <a:r>
               <a:rPr lang="en-US" sz="1500" dirty="0">
                 <a:solidFill>
-                  <a:srgbClr val="374151"/>
-                </a:solidFill>
+                  <a:srgbClr val="23282E"/>
+                </a:solidFill>
+                <a:latin typeface="Corbel" pitchFamily="34" charset="0"/>
+                <a:ea typeface="Corbel" pitchFamily="34" charset="-122"/>
+                <a:cs typeface="Corbel" pitchFamily="34" charset="-120"/>
               </a:rPr>
               <a:t>Anonymity means even the researcher cannot link data to a person; confidentiality means the researcher can but will not disclose</a:t>
             </a:r>
@@ -3331,19 +3425,22 @@
           <a:p>
             <a:pPr marL="342900" indent="-342900">
               <a:lnSpc>
-                <a:spcPct val="125000"/>
+                <a:spcPct val="130000"/>
               </a:lnSpc>
               <a:spcAft>
-                <a:spcPts val="800"/>
+                <a:spcPts val="1100"/>
               </a:spcAft>
               <a:buSzPct val="100000"/>
-              <a:buChar char="•"/>
+              <a:buChar char="–"/>
             </a:pPr>
             <a:r>
               <a:rPr lang="en-US" sz="1500" dirty="0">
                 <a:solidFill>
-                  <a:srgbClr val="374151"/>
-                </a:solidFill>
+                  <a:srgbClr val="23282E"/>
+                </a:solidFill>
+                <a:latin typeface="Corbel" pitchFamily="34" charset="0"/>
+                <a:ea typeface="Corbel" pitchFamily="34" charset="-122"/>
+                <a:cs typeface="Corbel" pitchFamily="34" charset="-120"/>
               </a:rPr>
               <a:t>Most studies offer confidentiality, not anonymity — say which, accurately</a:t>
             </a:r>
@@ -3352,19 +3449,22 @@
           <a:p>
             <a:pPr marL="342900" indent="-342900">
               <a:lnSpc>
-                <a:spcPct val="125000"/>
+                <a:spcPct val="130000"/>
               </a:lnSpc>
               <a:spcAft>
-                <a:spcPts val="800"/>
+                <a:spcPts val="1100"/>
               </a:spcAft>
               <a:buSzPct val="100000"/>
-              <a:buChar char="•"/>
+              <a:buChar char="–"/>
             </a:pPr>
             <a:r>
               <a:rPr lang="en-US" sz="1500" dirty="0">
                 <a:solidFill>
-                  <a:srgbClr val="374151"/>
-                </a:solidFill>
+                  <a:srgbClr val="23282E"/>
+                </a:solidFill>
+                <a:latin typeface="Corbel" pitchFamily="34" charset="0"/>
+                <a:ea typeface="Corbel" pitchFamily="34" charset="-122"/>
+                <a:cs typeface="Corbel" pitchFamily="34" charset="-120"/>
               </a:rPr>
               <a:t>De-identify at the earliest point; keep any linking key in a separate, encrypted, access-controlled file</a:t>
             </a:r>
@@ -3373,19 +3473,22 @@
           <a:p>
             <a:pPr marL="342900" indent="-342900">
               <a:lnSpc>
-                <a:spcPct val="125000"/>
+                <a:spcPct val="130000"/>
               </a:lnSpc>
               <a:spcAft>
-                <a:spcPts val="800"/>
+                <a:spcPts val="1100"/>
               </a:spcAft>
               <a:buSzPct val="100000"/>
-              <a:buChar char="•"/>
+              <a:buChar char="–"/>
             </a:pPr>
             <a:r>
               <a:rPr lang="en-US" sz="1500" dirty="0">
                 <a:solidFill>
-                  <a:srgbClr val="374151"/>
-                </a:solidFill>
+                  <a:srgbClr val="23282E"/>
+                </a:solidFill>
+                <a:latin typeface="Corbel" pitchFamily="34" charset="0"/>
+                <a:ea typeface="Corbel" pitchFamily="34" charset="-122"/>
+                <a:cs typeface="Corbel" pitchFamily="34" charset="-120"/>
               </a:rPr>
               <a:t>Ghana's Data Protection Act 2012 (Act 843) governs personal data, requiring lawful basis, purpose limitation and security</a:t>
             </a:r>
@@ -3405,8 +3508,8 @@
         </p:nvSpPr>
         <p:spPr>
           <a:xfrm>
-            <a:off x="8503920" y="4709160"/>
-            <a:ext cx="800000" cy="300000"/>
+            <a:off x="566928" y="4700016"/>
+            <a:ext cx="914400" cy="274320"/>
           </a:xfrm>
           <a:prstGeom prst="rect">
             <a:avLst/>
@@ -3421,10 +3524,13 @@
           <a:bodyPr/>
           <a:lstStyle>
             <a:lvl1pPr>
-              <a:defRPr sz="1000">
-                <a:solidFill>
-                  <a:srgbClr val="6B7280"/>
-                </a:solidFill>
+              <a:defRPr sz="900">
+                <a:solidFill>
+                  <a:srgbClr val="5F6B76"/>
+                </a:solidFill>
+                <a:latin typeface="Corbel"/>
+                <a:ea typeface="Corbel"/>
+                <a:cs typeface="Corbel"/>
               </a:defRPr>
             </a:lvl1pPr>
           </a:lstStyle>
@@ -3471,8 +3577,8 @@
         </p:nvSpPr>
         <p:spPr>
           <a:xfrm>
-            <a:off x="502920" y="292608"/>
-            <a:ext cx="8046720" cy="228600"/>
+            <a:off x="566928" y="384048"/>
+            <a:ext cx="7772400" cy="237744"/>
           </a:xfrm>
           <a:prstGeom prst="rect">
             <a:avLst/>
@@ -3488,14 +3594,17 @@
               <a:buNone/>
             </a:pPr>
             <a:r>
-              <a:rPr lang="en-US" sz="1100" b="1" spc="150" kern="0" dirty="0">
-                <a:solidFill>
-                  <a:srgbClr val="0066CC"/>
-                </a:solidFill>
+              <a:rPr lang="en-US" sz="1000" spc="200" kern="0" dirty="0">
+                <a:solidFill>
+                  <a:srgbClr val="9A6A3C"/>
+                </a:solidFill>
+                <a:latin typeface="Corbel" pitchFamily="34" charset="0"/>
+                <a:ea typeface="Corbel" pitchFamily="34" charset="-122"/>
+                <a:cs typeface="Corbel" pitchFamily="34" charset="-120"/>
               </a:rPr>
               <a:t>UNIT 9</a:t>
             </a:r>
-            <a:endParaRPr lang="en-US" sz="1100" dirty="0"/>
+            <a:endParaRPr lang="en-US" sz="1000" dirty="0"/>
           </a:p>
         </p:txBody>
       </p:sp>
@@ -3507,8 +3616,8 @@
         </p:nvSpPr>
         <p:spPr>
           <a:xfrm>
-            <a:off x="502920" y="548640"/>
-            <a:ext cx="8046720" cy="640080"/>
+            <a:off x="566928" y="658368"/>
+            <a:ext cx="7772400" cy="658368"/>
           </a:xfrm>
           <a:prstGeom prst="rect">
             <a:avLst/>
@@ -3521,30 +3630,56 @@
           <a:lstStyle/>
           <a:p>
             <a:pPr indent="0" marL="0">
+              <a:lnSpc>
+                <a:spcPct val="100000"/>
+              </a:lnSpc>
               <a:buNone/>
             </a:pPr>
             <a:r>
-              <a:rPr lang="en-US" sz="2400" b="1" dirty="0">
-                <a:solidFill>
-                  <a:srgbClr val="111827"/>
-                </a:solidFill>
+              <a:rPr lang="en-US" sz="2500" dirty="0">
+                <a:solidFill>
+                  <a:srgbClr val="1C3140"/>
+                </a:solidFill>
+                <a:latin typeface="Constantia" pitchFamily="34" charset="0"/>
+                <a:ea typeface="Constantia" pitchFamily="34" charset="-122"/>
+                <a:cs typeface="Constantia" pitchFamily="34" charset="-120"/>
               </a:rPr>
               <a:t>Confidentiality and data protection (2/2)</a:t>
             </a:r>
-            <a:endParaRPr lang="en-US" sz="2400" dirty="0"/>
-          </a:p>
-        </p:txBody>
-      </p:sp>
-      <p:sp>
-        <p:nvSpPr>
-          <p:cNvPr id="4" name="Text 2"/>
+            <a:endParaRPr lang="en-US" sz="2500" dirty="0"/>
+          </a:p>
+        </p:txBody>
+      </p:sp>
+      <p:sp>
+        <p:nvSpPr>
+          <p:cNvPr id="4" name="Shape 2"/>
           <p:cNvSpPr/>
           <p:nvPr/>
         </p:nvSpPr>
         <p:spPr>
           <a:xfrm>
-            <a:off x="685800" y="1325880"/>
-            <a:ext cx="7772400" cy="3200400"/>
+            <a:off x="566928" y="1335024"/>
+            <a:ext cx="566928" cy="20117"/>
+          </a:xfrm>
+          <a:prstGeom prst="rect">
+            <a:avLst/>
+          </a:prstGeom>
+          <a:solidFill>
+            <a:srgbClr val="9A6A3C"/>
+          </a:solidFill>
+          <a:ln/>
+        </p:spPr>
+      </p:sp>
+      <p:sp>
+        <p:nvSpPr>
+          <p:cNvPr id="5" name="Text 3"/>
+          <p:cNvSpPr/>
+          <p:nvPr/>
+        </p:nvSpPr>
+        <p:spPr>
+          <a:xfrm>
+            <a:off x="713232" y="1664208"/>
+            <a:ext cx="7498080" cy="2788920"/>
           </a:xfrm>
           <a:prstGeom prst="rect">
             <a:avLst/>
@@ -3558,19 +3693,22 @@
           <a:p>
             <a:pPr marL="342900" indent="-342900">
               <a:lnSpc>
-                <a:spcPct val="125000"/>
+                <a:spcPct val="130000"/>
               </a:lnSpc>
               <a:spcAft>
-                <a:spcPts val="800"/>
+                <a:spcPts val="1100"/>
               </a:spcAft>
               <a:buSzPct val="100000"/>
-              <a:buChar char="•"/>
+              <a:buChar char="–"/>
             </a:pPr>
             <a:r>
               <a:rPr lang="en-US" sz="1500" dirty="0">
                 <a:solidFill>
-                  <a:srgbClr val="374151"/>
-                </a:solidFill>
+                  <a:srgbClr val="23282E"/>
+                </a:solidFill>
+                <a:latin typeface="Corbel" pitchFamily="34" charset="0"/>
+                <a:ea typeface="Corbel" pitchFamily="34" charset="-122"/>
+                <a:cs typeface="Corbel" pitchFamily="34" charset="-120"/>
               </a:rPr>
               <a:t>State retention periods and how data will be destroyed or archived</a:t>
             </a:r>
@@ -3579,19 +3717,22 @@
           <a:p>
             <a:pPr marL="342900" indent="-342900">
               <a:lnSpc>
-                <a:spcPct val="125000"/>
+                <a:spcPct val="130000"/>
               </a:lnSpc>
               <a:spcAft>
-                <a:spcPts val="800"/>
+                <a:spcPts val="1100"/>
               </a:spcAft>
               <a:buSzPct val="100000"/>
-              <a:buChar char="•"/>
+              <a:buChar char="–"/>
             </a:pPr>
             <a:r>
               <a:rPr lang="en-US" sz="1500" dirty="0">
                 <a:solidFill>
-                  <a:srgbClr val="374151"/>
-                </a:solidFill>
+                  <a:srgbClr val="23282E"/>
+                </a:solidFill>
+                <a:latin typeface="Corbel" pitchFamily="34" charset="0"/>
+                <a:ea typeface="Corbel" pitchFamily="34" charset="-122"/>
+                <a:cs typeface="Corbel" pitchFamily="34" charset="-120"/>
               </a:rPr>
               <a:t>Qualitative data are especially re-identifiable — a role plus a district can identify someone even without a name</a:t>
             </a:r>
@@ -3600,19 +3741,22 @@
           <a:p>
             <a:pPr marL="342900" indent="-342900">
               <a:lnSpc>
-                <a:spcPct val="125000"/>
+                <a:spcPct val="130000"/>
               </a:lnSpc>
               <a:spcAft>
-                <a:spcPts val="800"/>
+                <a:spcPts val="1100"/>
               </a:spcAft>
               <a:buSzPct val="100000"/>
-              <a:buChar char="•"/>
+              <a:buChar char="–"/>
             </a:pPr>
             <a:r>
               <a:rPr lang="en-US" sz="1500" dirty="0">
                 <a:solidFill>
-                  <a:srgbClr val="374151"/>
-                </a:solidFill>
+                  <a:srgbClr val="23282E"/>
+                </a:solidFill>
+                <a:latin typeface="Corbel" pitchFamily="34" charset="0"/>
+                <a:ea typeface="Corbel" pitchFamily="34" charset="-122"/>
+                <a:cs typeface="Corbel" pitchFamily="34" charset="-120"/>
               </a:rPr>
               <a:t>Confidentiality has limits: disclosure of imminent harm or of certain crimes may compel action, and participants must be told this in advance</a:t>
             </a:r>
@@ -3632,8 +3776,8 @@
         </p:nvSpPr>
         <p:spPr>
           <a:xfrm>
-            <a:off x="8503920" y="4709160"/>
-            <a:ext cx="800000" cy="300000"/>
+            <a:off x="566928" y="4700016"/>
+            <a:ext cx="914400" cy="274320"/>
           </a:xfrm>
           <a:prstGeom prst="rect">
             <a:avLst/>
@@ -3648,10 +3792,13 @@
           <a:bodyPr/>
           <a:lstStyle>
             <a:lvl1pPr>
-              <a:defRPr sz="1000">
-                <a:solidFill>
-                  <a:srgbClr val="6B7280"/>
-                </a:solidFill>
+              <a:defRPr sz="900">
+                <a:solidFill>
+                  <a:srgbClr val="5F6B76"/>
+                </a:solidFill>
+                <a:latin typeface="Corbel"/>
+                <a:ea typeface="Corbel"/>
+                <a:cs typeface="Corbel"/>
               </a:defRPr>
             </a:lvl1pPr>
           </a:lstStyle>
@@ -3698,8 +3845,8 @@
         </p:nvSpPr>
         <p:spPr>
           <a:xfrm>
-            <a:off x="502920" y="292608"/>
-            <a:ext cx="8046720" cy="228600"/>
+            <a:off x="566928" y="384048"/>
+            <a:ext cx="7772400" cy="237744"/>
           </a:xfrm>
           <a:prstGeom prst="rect">
             <a:avLst/>
@@ -3715,14 +3862,17 @@
               <a:buNone/>
             </a:pPr>
             <a:r>
-              <a:rPr lang="en-US" sz="1100" b="1" spc="150" kern="0" dirty="0">
-                <a:solidFill>
-                  <a:srgbClr val="0066CC"/>
-                </a:solidFill>
+              <a:rPr lang="en-US" sz="1000" spc="200" kern="0" dirty="0">
+                <a:solidFill>
+                  <a:srgbClr val="9A6A3C"/>
+                </a:solidFill>
+                <a:latin typeface="Corbel" pitchFamily="34" charset="0"/>
+                <a:ea typeface="Corbel" pitchFamily="34" charset="-122"/>
+                <a:cs typeface="Corbel" pitchFamily="34" charset="-120"/>
               </a:rPr>
               <a:t>UNIT 9</a:t>
             </a:r>
-            <a:endParaRPr lang="en-US" sz="1100" dirty="0"/>
+            <a:endParaRPr lang="en-US" sz="1000" dirty="0"/>
           </a:p>
         </p:txBody>
       </p:sp>
@@ -3734,8 +3884,8 @@
         </p:nvSpPr>
         <p:spPr>
           <a:xfrm>
-            <a:off x="502920" y="548640"/>
-            <a:ext cx="8046720" cy="640080"/>
+            <a:off x="566928" y="658368"/>
+            <a:ext cx="7772400" cy="658368"/>
           </a:xfrm>
           <a:prstGeom prst="rect">
             <a:avLst/>
@@ -3748,30 +3898,56 @@
           <a:lstStyle/>
           <a:p>
             <a:pPr indent="0" marL="0">
+              <a:lnSpc>
+                <a:spcPct val="100000"/>
+              </a:lnSpc>
               <a:buNone/>
             </a:pPr>
             <a:r>
-              <a:rPr lang="en-US" sz="2400" b="1" dirty="0">
-                <a:solidFill>
-                  <a:srgbClr val="111827"/>
-                </a:solidFill>
+              <a:rPr lang="en-US" sz="2500" dirty="0">
+                <a:solidFill>
+                  <a:srgbClr val="1C3140"/>
+                </a:solidFill>
+                <a:latin typeface="Constantia" pitchFamily="34" charset="0"/>
+                <a:ea typeface="Constantia" pitchFamily="34" charset="-122"/>
+                <a:cs typeface="Constantia" pitchFamily="34" charset="-120"/>
               </a:rPr>
               <a:t>Integrity, authorship and AI (1/3)</a:t>
             </a:r>
-            <a:endParaRPr lang="en-US" sz="2400" dirty="0"/>
-          </a:p>
-        </p:txBody>
-      </p:sp>
-      <p:sp>
-        <p:nvSpPr>
-          <p:cNvPr id="4" name="Text 2"/>
+            <a:endParaRPr lang="en-US" sz="2500" dirty="0"/>
+          </a:p>
+        </p:txBody>
+      </p:sp>
+      <p:sp>
+        <p:nvSpPr>
+          <p:cNvPr id="4" name="Shape 2"/>
           <p:cNvSpPr/>
           <p:nvPr/>
         </p:nvSpPr>
         <p:spPr>
           <a:xfrm>
-            <a:off x="685800" y="1325880"/>
-            <a:ext cx="7772400" cy="3200400"/>
+            <a:off x="566928" y="1335024"/>
+            <a:ext cx="566928" cy="20117"/>
+          </a:xfrm>
+          <a:prstGeom prst="rect">
+            <a:avLst/>
+          </a:prstGeom>
+          <a:solidFill>
+            <a:srgbClr val="9A6A3C"/>
+          </a:solidFill>
+          <a:ln/>
+        </p:spPr>
+      </p:sp>
+      <p:sp>
+        <p:nvSpPr>
+          <p:cNvPr id="5" name="Text 3"/>
+          <p:cNvSpPr/>
+          <p:nvPr/>
+        </p:nvSpPr>
+        <p:spPr>
+          <a:xfrm>
+            <a:off x="713232" y="1664208"/>
+            <a:ext cx="7498080" cy="2788920"/>
           </a:xfrm>
           <a:prstGeom prst="rect">
             <a:avLst/>
@@ -3785,19 +3961,22 @@
           <a:p>
             <a:pPr marL="342900" indent="-342900">
               <a:lnSpc>
-                <a:spcPct val="125000"/>
+                <a:spcPct val="130000"/>
               </a:lnSpc>
               <a:spcAft>
-                <a:spcPts val="800"/>
+                <a:spcPts val="1100"/>
               </a:spcAft>
               <a:buSzPct val="100000"/>
-              <a:buChar char="•"/>
+              <a:buChar char="–"/>
             </a:pPr>
             <a:r>
               <a:rPr lang="en-US" sz="1500" dirty="0">
                 <a:solidFill>
-                  <a:srgbClr val="374151"/>
-                </a:solidFill>
+                  <a:srgbClr val="23282E"/>
+                </a:solidFill>
+                <a:latin typeface="Corbel" pitchFamily="34" charset="0"/>
+                <a:ea typeface="Corbel" pitchFamily="34" charset="-122"/>
+                <a:cs typeface="Corbel" pitchFamily="34" charset="-120"/>
               </a:rPr>
               <a:t>Fabrication (inventing data), falsification (altering data) and plagiarism are the three classical forms of misconduct</a:t>
             </a:r>
@@ -3806,19 +3985,22 @@
           <a:p>
             <a:pPr marL="342900" indent="-342900">
               <a:lnSpc>
-                <a:spcPct val="125000"/>
+                <a:spcPct val="130000"/>
               </a:lnSpc>
               <a:spcAft>
-                <a:spcPts val="800"/>
+                <a:spcPts val="1100"/>
               </a:spcAft>
               <a:buSzPct val="100000"/>
-              <a:buChar char="•"/>
+              <a:buChar char="–"/>
             </a:pPr>
             <a:r>
               <a:rPr lang="en-US" sz="1500" dirty="0">
                 <a:solidFill>
-                  <a:srgbClr val="374151"/>
-                </a:solidFill>
+                  <a:srgbClr val="23282E"/>
+                </a:solidFill>
+                <a:latin typeface="Corbel" pitchFamily="34" charset="0"/>
+                <a:ea typeface="Corbel" pitchFamily="34" charset="-122"/>
+                <a:cs typeface="Corbel" pitchFamily="34" charset="-120"/>
               </a:rPr>
               <a:t>Self-plagiarism and duplicate publication are also breaches, even though the text is your own</a:t>
             </a:r>
@@ -3827,19 +4009,22 @@
           <a:p>
             <a:pPr marL="342900" indent="-342900">
               <a:lnSpc>
-                <a:spcPct val="125000"/>
+                <a:spcPct val="130000"/>
               </a:lnSpc>
               <a:spcAft>
-                <a:spcPts val="800"/>
+                <a:spcPts val="1100"/>
               </a:spcAft>
               <a:buSzPct val="100000"/>
-              <a:buChar char="•"/>
+              <a:buChar char="–"/>
             </a:pPr>
             <a:r>
               <a:rPr lang="en-US" sz="1500" dirty="0">
                 <a:solidFill>
-                  <a:srgbClr val="374151"/>
-                </a:solidFill>
+                  <a:srgbClr val="23282E"/>
+                </a:solidFill>
+                <a:latin typeface="Corbel" pitchFamily="34" charset="0"/>
+                <a:ea typeface="Corbel" pitchFamily="34" charset="-122"/>
+                <a:cs typeface="Corbel" pitchFamily="34" charset="-120"/>
               </a:rPr>
               <a:t>ICMJE authorship requires all four: substantial contribution, drafting or critical revision, final approval, and accountability for the work</a:t>
             </a:r>
@@ -3859,8 +4044,8 @@
         </p:nvSpPr>
         <p:spPr>
           <a:xfrm>
-            <a:off x="8503920" y="4709160"/>
-            <a:ext cx="800000" cy="300000"/>
+            <a:off x="566928" y="4700016"/>
+            <a:ext cx="914400" cy="274320"/>
           </a:xfrm>
           <a:prstGeom prst="rect">
             <a:avLst/>
@@ -3875,10 +4060,13 @@
           <a:bodyPr/>
           <a:lstStyle>
             <a:lvl1pPr>
-              <a:defRPr sz="1000">
-                <a:solidFill>
-                  <a:srgbClr val="6B7280"/>
-                </a:solidFill>
+              <a:defRPr sz="900">
+                <a:solidFill>
+                  <a:srgbClr val="5F6B76"/>
+                </a:solidFill>
+                <a:latin typeface="Corbel"/>
+                <a:ea typeface="Corbel"/>
+                <a:cs typeface="Corbel"/>
               </a:defRPr>
             </a:lvl1pPr>
           </a:lstStyle>
@@ -3925,8 +4113,8 @@
         </p:nvSpPr>
         <p:spPr>
           <a:xfrm>
-            <a:off x="502920" y="292608"/>
-            <a:ext cx="8046720" cy="228600"/>
+            <a:off x="566928" y="384048"/>
+            <a:ext cx="7772400" cy="237744"/>
           </a:xfrm>
           <a:prstGeom prst="rect">
             <a:avLst/>
@@ -3942,14 +4130,17 @@
               <a:buNone/>
             </a:pPr>
             <a:r>
-              <a:rPr lang="en-US" sz="1100" b="1" spc="150" kern="0" dirty="0">
-                <a:solidFill>
-                  <a:srgbClr val="0066CC"/>
-                </a:solidFill>
+              <a:rPr lang="en-US" sz="1000" spc="200" kern="0" dirty="0">
+                <a:solidFill>
+                  <a:srgbClr val="9A6A3C"/>
+                </a:solidFill>
+                <a:latin typeface="Corbel" pitchFamily="34" charset="0"/>
+                <a:ea typeface="Corbel" pitchFamily="34" charset="-122"/>
+                <a:cs typeface="Corbel" pitchFamily="34" charset="-120"/>
               </a:rPr>
               <a:t>UNIT 9</a:t>
             </a:r>
-            <a:endParaRPr lang="en-US" sz="1100" dirty="0"/>
+            <a:endParaRPr lang="en-US" sz="1000" dirty="0"/>
           </a:p>
         </p:txBody>
       </p:sp>
@@ -3961,8 +4152,8 @@
         </p:nvSpPr>
         <p:spPr>
           <a:xfrm>
-            <a:off x="502920" y="548640"/>
-            <a:ext cx="8046720" cy="640080"/>
+            <a:off x="566928" y="658368"/>
+            <a:ext cx="7772400" cy="658368"/>
           </a:xfrm>
           <a:prstGeom prst="rect">
             <a:avLst/>
@@ -3975,30 +4166,56 @@
           <a:lstStyle/>
           <a:p>
             <a:pPr indent="0" marL="0">
+              <a:lnSpc>
+                <a:spcPct val="100000"/>
+              </a:lnSpc>
               <a:buNone/>
             </a:pPr>
             <a:r>
-              <a:rPr lang="en-US" sz="2400" b="1" dirty="0">
-                <a:solidFill>
-                  <a:srgbClr val="111827"/>
-                </a:solidFill>
+              <a:rPr lang="en-US" sz="2500" dirty="0">
+                <a:solidFill>
+                  <a:srgbClr val="1C3140"/>
+                </a:solidFill>
+                <a:latin typeface="Constantia" pitchFamily="34" charset="0"/>
+                <a:ea typeface="Constantia" pitchFamily="34" charset="-122"/>
+                <a:cs typeface="Constantia" pitchFamily="34" charset="-120"/>
               </a:rPr>
               <a:t>Integrity, authorship and AI (2/3)</a:t>
             </a:r>
-            <a:endParaRPr lang="en-US" sz="2400" dirty="0"/>
-          </a:p>
-        </p:txBody>
-      </p:sp>
-      <p:sp>
-        <p:nvSpPr>
-          <p:cNvPr id="4" name="Text 2"/>
+            <a:endParaRPr lang="en-US" sz="2500" dirty="0"/>
+          </a:p>
+        </p:txBody>
+      </p:sp>
+      <p:sp>
+        <p:nvSpPr>
+          <p:cNvPr id="4" name="Shape 2"/>
           <p:cNvSpPr/>
           <p:nvPr/>
         </p:nvSpPr>
         <p:spPr>
           <a:xfrm>
-            <a:off x="685800" y="1325880"/>
-            <a:ext cx="7772400" cy="3200400"/>
+            <a:off x="566928" y="1335024"/>
+            <a:ext cx="566928" cy="20117"/>
+          </a:xfrm>
+          <a:prstGeom prst="rect">
+            <a:avLst/>
+          </a:prstGeom>
+          <a:solidFill>
+            <a:srgbClr val="9A6A3C"/>
+          </a:solidFill>
+          <a:ln/>
+        </p:spPr>
+      </p:sp>
+      <p:sp>
+        <p:nvSpPr>
+          <p:cNvPr id="5" name="Text 3"/>
+          <p:cNvSpPr/>
+          <p:nvPr/>
+        </p:nvSpPr>
+        <p:spPr>
+          <a:xfrm>
+            <a:off x="713232" y="1664208"/>
+            <a:ext cx="7498080" cy="2788920"/>
           </a:xfrm>
           <a:prstGeom prst="rect">
             <a:avLst/>
@@ -4012,19 +4229,22 @@
           <a:p>
             <a:pPr marL="342900" indent="-342900">
               <a:lnSpc>
-                <a:spcPct val="125000"/>
+                <a:spcPct val="130000"/>
               </a:lnSpc>
               <a:spcAft>
-                <a:spcPts val="800"/>
+                <a:spcPts val="1100"/>
               </a:spcAft>
               <a:buSzPct val="100000"/>
-              <a:buChar char="•"/>
+              <a:buChar char="–"/>
             </a:pPr>
             <a:r>
               <a:rPr lang="en-US" sz="1500" dirty="0">
                 <a:solidFill>
-                  <a:srgbClr val="374151"/>
-                </a:solidFill>
+                  <a:srgbClr val="23282E"/>
+                </a:solidFill>
+                <a:latin typeface="Corbel" pitchFamily="34" charset="0"/>
+                <a:ea typeface="Corbel" pitchFamily="34" charset="-122"/>
+                <a:cs typeface="Corbel" pitchFamily="34" charset="-120"/>
               </a:rPr>
               <a:t>Supervisors are not automatically authors; funders and heads of department are not authors by virtue of position — gift authorship is a breach</a:t>
             </a:r>
@@ -4033,19 +4253,22 @@
           <a:p>
             <a:pPr marL="342900" indent="-342900">
               <a:lnSpc>
-                <a:spcPct val="125000"/>
+                <a:spcPct val="130000"/>
               </a:lnSpc>
               <a:spcAft>
-                <a:spcPts val="800"/>
+                <a:spcPts val="1100"/>
               </a:spcAft>
               <a:buSzPct val="100000"/>
-              <a:buChar char="•"/>
+              <a:buChar char="–"/>
             </a:pPr>
             <a:r>
               <a:rPr lang="en-US" sz="1500" dirty="0">
                 <a:solidFill>
-                  <a:srgbClr val="374151"/>
-                </a:solidFill>
+                  <a:srgbClr val="23282E"/>
+                </a:solidFill>
+                <a:latin typeface="Corbel" pitchFamily="34" charset="0"/>
+                <a:ea typeface="Corbel" pitchFamily="34" charset="-122"/>
+                <a:cs typeface="Corbel" pitchFamily="34" charset="-120"/>
               </a:rPr>
               <a:t>Agree the authorship order in writing at the start, not after the results arrive</a:t>
             </a:r>
@@ -4054,19 +4277,22 @@
           <a:p>
             <a:pPr marL="342900" indent="-342900">
               <a:lnSpc>
-                <a:spcPct val="125000"/>
+                <a:spcPct val="130000"/>
               </a:lnSpc>
               <a:spcAft>
-                <a:spcPts val="800"/>
+                <a:spcPts val="1100"/>
               </a:spcAft>
               <a:buSzPct val="100000"/>
-              <a:buChar char="•"/>
+              <a:buChar char="–"/>
             </a:pPr>
             <a:r>
               <a:rPr lang="en-US" sz="1500" dirty="0">
                 <a:solidFill>
-                  <a:srgbClr val="374151"/>
-                </a:solidFill>
+                  <a:srgbClr val="23282E"/>
+                </a:solidFill>
+                <a:latin typeface="Corbel" pitchFamily="34" charset="0"/>
+                <a:ea typeface="Corbel" pitchFamily="34" charset="-122"/>
+                <a:cs typeface="Corbel" pitchFamily="34" charset="-120"/>
               </a:rPr>
               <a:t>Declare funding and conflicts of interest; register trials prospectively and consider preregistering observational protocols</a:t>
             </a:r>
@@ -4075,19 +4301,22 @@
           <a:p>
             <a:pPr marL="342900" indent="-342900">
               <a:lnSpc>
-                <a:spcPct val="125000"/>
+                <a:spcPct val="130000"/>
               </a:lnSpc>
               <a:spcAft>
-                <a:spcPts val="800"/>
+                <a:spcPts val="1100"/>
               </a:spcAft>
               <a:buSzPct val="100000"/>
-              <a:buChar char="•"/>
+              <a:buChar char="–"/>
             </a:pPr>
             <a:r>
               <a:rPr lang="en-US" sz="1500" dirty="0">
                 <a:solidFill>
-                  <a:srgbClr val="374151"/>
-                </a:solidFill>
+                  <a:srgbClr val="23282E"/>
+                </a:solidFill>
+                <a:latin typeface="Corbel" pitchFamily="34" charset="0"/>
+                <a:ea typeface="Corbel" pitchFamily="34" charset="-122"/>
+                <a:cs typeface="Corbel" pitchFamily="34" charset="-120"/>
               </a:rPr>
               <a:t>Report negative and null results — suppressing them distorts the literature and wastes participants' contribution</a:t>
             </a:r>
@@ -4107,8 +4336,8 @@
         </p:nvSpPr>
         <p:spPr>
           <a:xfrm>
-            <a:off x="8503920" y="4709160"/>
-            <a:ext cx="800000" cy="300000"/>
+            <a:off x="566928" y="4700016"/>
+            <a:ext cx="914400" cy="274320"/>
           </a:xfrm>
           <a:prstGeom prst="rect">
             <a:avLst/>
@@ -4123,10 +4352,13 @@
           <a:bodyPr/>
           <a:lstStyle>
             <a:lvl1pPr>
-              <a:defRPr sz="1000">
-                <a:solidFill>
-                  <a:srgbClr val="6B7280"/>
-                </a:solidFill>
+              <a:defRPr sz="900">
+                <a:solidFill>
+                  <a:srgbClr val="5F6B76"/>
+                </a:solidFill>
+                <a:latin typeface="Corbel"/>
+                <a:ea typeface="Corbel"/>
+                <a:cs typeface="Corbel"/>
               </a:defRPr>
             </a:lvl1pPr>
           </a:lstStyle>
@@ -4173,8 +4405,8 @@
         </p:nvSpPr>
         <p:spPr>
           <a:xfrm>
-            <a:off x="502920" y="292608"/>
-            <a:ext cx="8046720" cy="228600"/>
+            <a:off x="566928" y="384048"/>
+            <a:ext cx="7772400" cy="237744"/>
           </a:xfrm>
           <a:prstGeom prst="rect">
             <a:avLst/>
@@ -4190,14 +4422,17 @@
               <a:buNone/>
             </a:pPr>
             <a:r>
-              <a:rPr lang="en-US" sz="1100" b="1" spc="150" kern="0" dirty="0">
-                <a:solidFill>
-                  <a:srgbClr val="0066CC"/>
-                </a:solidFill>
+              <a:rPr lang="en-US" sz="1000" spc="200" kern="0" dirty="0">
+                <a:solidFill>
+                  <a:srgbClr val="9A6A3C"/>
+                </a:solidFill>
+                <a:latin typeface="Corbel" pitchFamily="34" charset="0"/>
+                <a:ea typeface="Corbel" pitchFamily="34" charset="-122"/>
+                <a:cs typeface="Corbel" pitchFamily="34" charset="-120"/>
               </a:rPr>
               <a:t>UNIT 9</a:t>
             </a:r>
-            <a:endParaRPr lang="en-US" sz="1100" dirty="0"/>
+            <a:endParaRPr lang="en-US" sz="1000" dirty="0"/>
           </a:p>
         </p:txBody>
       </p:sp>
@@ -4209,8 +4444,8 @@
         </p:nvSpPr>
         <p:spPr>
           <a:xfrm>
-            <a:off x="502920" y="548640"/>
-            <a:ext cx="8046720" cy="640080"/>
+            <a:off x="566928" y="658368"/>
+            <a:ext cx="7772400" cy="658368"/>
           </a:xfrm>
           <a:prstGeom prst="rect">
             <a:avLst/>
@@ -4223,30 +4458,56 @@
           <a:lstStyle/>
           <a:p>
             <a:pPr indent="0" marL="0">
+              <a:lnSpc>
+                <a:spcPct val="100000"/>
+              </a:lnSpc>
               <a:buNone/>
             </a:pPr>
             <a:r>
-              <a:rPr lang="en-US" sz="2400" b="1" dirty="0">
-                <a:solidFill>
-                  <a:srgbClr val="111827"/>
-                </a:solidFill>
+              <a:rPr lang="en-US" sz="2500" dirty="0">
+                <a:solidFill>
+                  <a:srgbClr val="1C3140"/>
+                </a:solidFill>
+                <a:latin typeface="Constantia" pitchFamily="34" charset="0"/>
+                <a:ea typeface="Constantia" pitchFamily="34" charset="-122"/>
+                <a:cs typeface="Constantia" pitchFamily="34" charset="-120"/>
               </a:rPr>
               <a:t>Integrity, authorship and AI (3/3)</a:t>
             </a:r>
-            <a:endParaRPr lang="en-US" sz="2400" dirty="0"/>
-          </a:p>
-        </p:txBody>
-      </p:sp>
-      <p:sp>
-        <p:nvSpPr>
-          <p:cNvPr id="4" name="Text 2"/>
+            <a:endParaRPr lang="en-US" sz="2500" dirty="0"/>
+          </a:p>
+        </p:txBody>
+      </p:sp>
+      <p:sp>
+        <p:nvSpPr>
+          <p:cNvPr id="4" name="Shape 2"/>
           <p:cNvSpPr/>
           <p:nvPr/>
         </p:nvSpPr>
         <p:spPr>
           <a:xfrm>
-            <a:off x="685800" y="1325880"/>
-            <a:ext cx="7772400" cy="3200400"/>
+            <a:off x="566928" y="1335024"/>
+            <a:ext cx="566928" cy="20117"/>
+          </a:xfrm>
+          <a:prstGeom prst="rect">
+            <a:avLst/>
+          </a:prstGeom>
+          <a:solidFill>
+            <a:srgbClr val="9A6A3C"/>
+          </a:solidFill>
+          <a:ln/>
+        </p:spPr>
+      </p:sp>
+      <p:sp>
+        <p:nvSpPr>
+          <p:cNvPr id="5" name="Text 3"/>
+          <p:cNvSpPr/>
+          <p:nvPr/>
+        </p:nvSpPr>
+        <p:spPr>
+          <a:xfrm>
+            <a:off x="713232" y="1664208"/>
+            <a:ext cx="7498080" cy="2788920"/>
           </a:xfrm>
           <a:prstGeom prst="rect">
             <a:avLst/>
@@ -4260,44 +4521,50 @@
           <a:p>
             <a:pPr marL="342900" indent="-342900">
               <a:lnSpc>
-                <a:spcPct val="125000"/>
+                <a:spcPct val="130000"/>
               </a:lnSpc>
               <a:spcAft>
-                <a:spcPts val="800"/>
+                <a:spcPts val="1100"/>
               </a:spcAft>
               <a:buSzPct val="100000"/>
-              <a:buChar char="•"/>
-            </a:pPr>
-            <a:r>
-              <a:rPr lang="en-US" sz="1300" dirty="0">
-                <a:solidFill>
-                  <a:srgbClr val="374151"/>
-                </a:solidFill>
+              <a:buChar char="–"/>
+            </a:pPr>
+            <a:r>
+              <a:rPr lang="en-US" sz="1350" dirty="0">
+                <a:solidFill>
+                  <a:srgbClr val="23282E"/>
+                </a:solidFill>
+                <a:latin typeface="Corbel" pitchFamily="34" charset="0"/>
+                <a:ea typeface="Corbel" pitchFamily="34" charset="-122"/>
+                <a:cs typeface="Corbel" pitchFamily="34" charset="-120"/>
               </a:rPr>
               <a:t>AI tools may assist with language, structure and code, but the researcher remains accountable for every claim; AI cannot be an author, must not be used to generate data or references, and its use should be disclosed as journals and institutions increasingly require</a:t>
             </a:r>
-            <a:endParaRPr lang="en-US" sz="1300" dirty="0"/>
+            <a:endParaRPr lang="en-US" sz="1350" dirty="0"/>
           </a:p>
           <a:p>
             <a:pPr marL="342900" indent="-342900">
               <a:lnSpc>
-                <a:spcPct val="125000"/>
+                <a:spcPct val="130000"/>
               </a:lnSpc>
               <a:spcAft>
-                <a:spcPts val="800"/>
+                <a:spcPts val="1100"/>
               </a:spcAft>
               <a:buSzPct val="100000"/>
-              <a:buChar char="•"/>
-            </a:pPr>
-            <a:r>
-              <a:rPr lang="en-US" sz="1300" dirty="0">
-                <a:solidFill>
-                  <a:srgbClr val="374151"/>
-                </a:solidFill>
+              <a:buChar char="–"/>
+            </a:pPr>
+            <a:r>
+              <a:rPr lang="en-US" sz="1350" dirty="0">
+                <a:solidFill>
+                  <a:srgbClr val="23282E"/>
+                </a:solidFill>
+                <a:latin typeface="Corbel" pitchFamily="34" charset="0"/>
+                <a:ea typeface="Corbel" pitchFamily="34" charset="-122"/>
+                <a:cs typeface="Corbel" pitchFamily="34" charset="-120"/>
               </a:rPr>
               <a:t>Never paste identifiable participant data into a public AI service — that is a data protection breach regardless of the research value</a:t>
             </a:r>
-            <a:endParaRPr lang="en-US" sz="1300" dirty="0"/>
+            <a:endParaRPr lang="en-US" sz="1350" dirty="0"/>
           </a:p>
         </p:txBody>
       </p:sp>
@@ -4313,8 +4580,8 @@
         </p:nvSpPr>
         <p:spPr>
           <a:xfrm>
-            <a:off x="8503920" y="4709160"/>
-            <a:ext cx="800000" cy="300000"/>
+            <a:off x="566928" y="4700016"/>
+            <a:ext cx="914400" cy="274320"/>
           </a:xfrm>
           <a:prstGeom prst="rect">
             <a:avLst/>
@@ -4329,10 +4596,13 @@
           <a:bodyPr/>
           <a:lstStyle>
             <a:lvl1pPr>
-              <a:defRPr sz="1000">
-                <a:solidFill>
-                  <a:srgbClr val="6B7280"/>
-                </a:solidFill>
+              <a:defRPr sz="900">
+                <a:solidFill>
+                  <a:srgbClr val="5F6B76"/>
+                </a:solidFill>
+                <a:latin typeface="Corbel"/>
+                <a:ea typeface="Corbel"/>
+                <a:cs typeface="Corbel"/>
               </a:defRPr>
             </a:lvl1pPr>
           </a:lstStyle>
@@ -4379,8 +4649,8 @@
         </p:nvSpPr>
         <p:spPr>
           <a:xfrm>
-            <a:off x="502920" y="292608"/>
-            <a:ext cx="8046720" cy="228600"/>
+            <a:off x="566928" y="384048"/>
+            <a:ext cx="7772400" cy="237744"/>
           </a:xfrm>
           <a:prstGeom prst="rect">
             <a:avLst/>
@@ -4396,14 +4666,17 @@
               <a:buNone/>
             </a:pPr>
             <a:r>
-              <a:rPr lang="en-US" sz="1100" b="1" spc="150" kern="0" dirty="0">
-                <a:solidFill>
-                  <a:srgbClr val="00A86B"/>
-                </a:solidFill>
+              <a:rPr lang="en-US" sz="1000" spc="200" kern="0" dirty="0">
+                <a:solidFill>
+                  <a:srgbClr val="9A6A3C"/>
+                </a:solidFill>
+                <a:latin typeface="Corbel" pitchFamily="34" charset="0"/>
+                <a:ea typeface="Corbel" pitchFamily="34" charset="-122"/>
+                <a:cs typeface="Corbel" pitchFamily="34" charset="-120"/>
               </a:rPr>
               <a:t>UNIT 9  ·  WORKED EXAMPLE</a:t>
             </a:r>
-            <a:endParaRPr lang="en-US" sz="1100" dirty="0"/>
+            <a:endParaRPr lang="en-US" sz="1000" dirty="0"/>
           </a:p>
         </p:txBody>
       </p:sp>
@@ -4415,8 +4688,8 @@
         </p:nvSpPr>
         <p:spPr>
           <a:xfrm>
-            <a:off x="502920" y="548640"/>
-            <a:ext cx="8046720" cy="566928"/>
+            <a:off x="566928" y="658368"/>
+            <a:ext cx="7772400" cy="658368"/>
           </a:xfrm>
           <a:prstGeom prst="rect">
             <a:avLst/>
@@ -4429,17 +4702,23 @@
           <a:lstStyle/>
           <a:p>
             <a:pPr indent="0" marL="0">
+              <a:lnSpc>
+                <a:spcPct val="100000"/>
+              </a:lnSpc>
               <a:buNone/>
             </a:pPr>
             <a:r>
-              <a:rPr lang="en-US" sz="2300" b="1" dirty="0">
-                <a:solidFill>
-                  <a:srgbClr val="111827"/>
-                </a:solidFill>
+              <a:rPr lang="en-US" sz="2500" dirty="0">
+                <a:solidFill>
+                  <a:srgbClr val="1C3140"/>
+                </a:solidFill>
+                <a:latin typeface="Constantia" pitchFamily="34" charset="0"/>
+                <a:ea typeface="Constantia" pitchFamily="34" charset="-122"/>
+                <a:cs typeface="Constantia" pitchFamily="34" charset="-120"/>
               </a:rPr>
               <a:t>Consent when the researcher holds power over the participant</a:t>
             </a:r>
-            <a:endParaRPr lang="en-US" sz="2300" dirty="0"/>
+            <a:endParaRPr lang="en-US" sz="2500" dirty="0"/>
           </a:p>
         </p:txBody>
       </p:sp>
@@ -4451,21 +4730,16 @@
         </p:nvSpPr>
         <p:spPr>
           <a:xfrm>
-            <a:off x="502920" y="1207008"/>
-            <a:ext cx="8138160" cy="3200400"/>
+            <a:off x="566928" y="1335024"/>
+            <a:ext cx="566928" cy="20117"/>
           </a:xfrm>
           <a:prstGeom prst="rect">
             <a:avLst/>
           </a:prstGeom>
           <a:solidFill>
-            <a:srgbClr val="F3F7FC"/>
+            <a:srgbClr val="9A6A3C"/>
           </a:solidFill>
-          <a:ln w="9525">
-            <a:solidFill>
-              <a:srgbClr val="0066CC"/>
-            </a:solidFill>
-            <a:prstDash val="solid"/>
-          </a:ln>
+          <a:ln/>
         </p:spPr>
       </p:sp>
       <p:sp>
@@ -4476,8 +4750,8 @@
         </p:nvSpPr>
         <p:spPr>
           <a:xfrm>
-            <a:off x="731520" y="1371600"/>
-            <a:ext cx="7680960" cy="1005840"/>
+            <a:off x="566928" y="1645920"/>
+            <a:ext cx="8010144" cy="822960"/>
           </a:xfrm>
           <a:prstGeom prst="rect">
             <a:avLst/>
@@ -4490,156 +4764,195 @@
           <a:lstStyle/>
           <a:p>
             <a:pPr indent="0" marL="0">
+              <a:lnSpc>
+                <a:spcPct val="124000"/>
+              </a:lnSpc>
+              <a:buNone/>
+            </a:pPr>
+            <a:r>
+              <a:rPr lang="en-US" sz="1300" i="1" dirty="0">
+                <a:solidFill>
+                  <a:srgbClr val="5F6B76"/>
+                </a:solidFill>
+                <a:latin typeface="Constantia" pitchFamily="34" charset="0"/>
+                <a:ea typeface="Constantia" pitchFamily="34" charset="-122"/>
+                <a:cs typeface="Constantia" pitchFamily="34" charset="-120"/>
+              </a:rPr>
+              <a:t>A lecturer wants to survey her own final-year students about their experience of the programme. She will administer it herself, at the end of a lecture she teaches.</a:t>
+            </a:r>
+            <a:endParaRPr lang="en-US" sz="1300" dirty="0"/>
+          </a:p>
+        </p:txBody>
+      </p:sp>
+      <p:sp>
+        <p:nvSpPr>
+          <p:cNvPr id="6" name="Text 4"/>
+          <p:cNvSpPr/>
+          <p:nvPr/>
+        </p:nvSpPr>
+        <p:spPr>
+          <a:xfrm>
+            <a:off x="786384" y="2523744"/>
+            <a:ext cx="7406640" cy="1920240"/>
+          </a:xfrm>
+          <a:prstGeom prst="rect">
+            <a:avLst/>
+          </a:prstGeom>
+          <a:noFill/>
+          <a:ln/>
+        </p:spPr>
+        <p:txBody>
+          <a:bodyPr wrap="square" rtlCol="0" anchor="t"/>
+          <a:lstStyle/>
+          <a:p>
+            <a:pPr marL="342900" indent="-342900">
               <a:lnSpc>
                 <a:spcPct val="120000"/>
               </a:lnSpc>
-              <a:buNone/>
-            </a:pPr>
-            <a:r>
-              <a:rPr lang="en-US" sz="1400" i="1" dirty="0">
-                <a:solidFill>
-                  <a:srgbClr val="374151"/>
-                </a:solidFill>
-              </a:rPr>
-              <a:t>A lecturer wants to survey her own final-year students about their experience of the programme. She will administer it herself, at the end of a lecture she teaches.</a:t>
-            </a:r>
-            <a:endParaRPr lang="en-US" sz="1400" dirty="0"/>
-          </a:p>
-        </p:txBody>
-      </p:sp>
-      <p:sp>
-        <p:nvSpPr>
-          <p:cNvPr id="6" name="Text 4"/>
-          <p:cNvSpPr/>
-          <p:nvPr/>
-        </p:nvSpPr>
-        <p:spPr>
-          <a:xfrm>
-            <a:off x="868680" y="2395728"/>
-            <a:ext cx="7452360" cy="1920240"/>
-          </a:xfrm>
-          <a:prstGeom prst="rect">
-            <a:avLst/>
-          </a:prstGeom>
-          <a:noFill/>
-          <a:ln/>
-        </p:spPr>
-        <p:txBody>
-          <a:bodyPr wrap="square" rtlCol="0" anchor="t"/>
-          <a:lstStyle/>
-          <a:p>
-            <a:pPr marL="342900" indent="-342900">
-              <a:lnSpc>
-                <a:spcPct val="115000"/>
-              </a:lnSpc>
+              <a:spcAft>
+                <a:spcPts val="500"/>
+              </a:spcAft>
               <a:buSzPct val="100000"/>
               <a:buFont typeface="+mj-lt"/>
               <a:buAutoNum type="arabicPeriod" startAt="1"/>
             </a:pPr>
             <a:r>
-              <a:rPr lang="en-US" sz="1300" dirty="0">
-                <a:solidFill>
-                  <a:srgbClr val="374151"/>
-                </a:solidFill>
+              <a:rPr lang="en-US" sz="1250" dirty="0">
+                <a:solidFill>
+                  <a:srgbClr val="23282E"/>
+                </a:solidFill>
+                <a:latin typeface="Corbel" pitchFamily="34" charset="0"/>
+                <a:ea typeface="Corbel" pitchFamily="34" charset="-122"/>
+                <a:cs typeface="Corbel" pitchFamily="34" charset="-120"/>
               </a:rPr>
               <a:t>Students may reasonably fear that declining, or answering critically, could affect their marks.</a:t>
             </a:r>
-            <a:endParaRPr lang="en-US" sz="1300" dirty="0"/>
+            <a:endParaRPr lang="en-US" sz="1250" dirty="0"/>
           </a:p>
           <a:p>
             <a:pPr marL="342900" indent="-342900">
               <a:lnSpc>
-                <a:spcPct val="115000"/>
+                <a:spcPct val="120000"/>
               </a:lnSpc>
+              <a:spcAft>
+                <a:spcPts val="500"/>
+              </a:spcAft>
               <a:buSzPct val="100000"/>
               <a:buFont typeface="+mj-lt"/>
               <a:buAutoNum type="arabicPeriod" startAt="1"/>
             </a:pPr>
             <a:r>
-              <a:rPr lang="en-US" sz="1300" dirty="0">
-                <a:solidFill>
-                  <a:srgbClr val="374151"/>
-                </a:solidFill>
+              <a:rPr lang="en-US" sz="1250" dirty="0">
+                <a:solidFill>
+                  <a:srgbClr val="23282E"/>
+                </a:solidFill>
+                <a:latin typeface="Corbel" pitchFamily="34" charset="0"/>
+                <a:ea typeface="Corbel" pitchFamily="34" charset="-122"/>
+                <a:cs typeface="Corbel" pitchFamily="34" charset="-120"/>
               </a:rPr>
               <a:t>That fear compromises voluntariness even if the lecturer would never act on it — the perception is enough.</a:t>
             </a:r>
-            <a:endParaRPr lang="en-US" sz="1300" dirty="0"/>
+            <a:endParaRPr lang="en-US" sz="1250" dirty="0"/>
           </a:p>
           <a:p>
             <a:pPr marL="342900" indent="-342900">
               <a:lnSpc>
-                <a:spcPct val="115000"/>
+                <a:spcPct val="120000"/>
               </a:lnSpc>
+              <a:spcAft>
+                <a:spcPts val="500"/>
+              </a:spcAft>
               <a:buSzPct val="100000"/>
               <a:buFont typeface="+mj-lt"/>
               <a:buAutoNum type="arabicPeriod" startAt="1"/>
             </a:pPr>
             <a:r>
-              <a:rPr lang="en-US" sz="1300" dirty="0">
-                <a:solidFill>
-                  <a:srgbClr val="374151"/>
-                </a:solidFill>
+              <a:rPr lang="en-US" sz="1250" dirty="0">
+                <a:solidFill>
+                  <a:srgbClr val="23282E"/>
+                </a:solidFill>
+                <a:latin typeface="Corbel" pitchFamily="34" charset="0"/>
+                <a:ea typeface="Corbel" pitchFamily="34" charset="-122"/>
+                <a:cs typeface="Corbel" pitchFamily="34" charset="-120"/>
               </a:rPr>
               <a:t>Fix one: an independent colleague, with no assessment role, administers and holds the data.</a:t>
             </a:r>
-            <a:endParaRPr lang="en-US" sz="1300" dirty="0"/>
+            <a:endParaRPr lang="en-US" sz="1250" dirty="0"/>
           </a:p>
           <a:p>
             <a:pPr marL="342900" indent="-342900">
               <a:lnSpc>
-                <a:spcPct val="115000"/>
+                <a:spcPct val="120000"/>
               </a:lnSpc>
+              <a:spcAft>
+                <a:spcPts val="500"/>
+              </a:spcAft>
               <a:buSzPct val="100000"/>
               <a:buFont typeface="+mj-lt"/>
               <a:buAutoNum type="arabicPeriod" startAt="1"/>
             </a:pPr>
             <a:r>
-              <a:rPr lang="en-US" sz="1300" dirty="0">
-                <a:solidFill>
-                  <a:srgbClr val="374151"/>
-                </a:solidFill>
+              <a:rPr lang="en-US" sz="1250" dirty="0">
+                <a:solidFill>
+                  <a:srgbClr val="23282E"/>
+                </a:solidFill>
+                <a:latin typeface="Corbel" pitchFamily="34" charset="0"/>
+                <a:ea typeface="Corbel" pitchFamily="34" charset="-122"/>
+                <a:cs typeface="Corbel" pitchFamily="34" charset="-120"/>
               </a:rPr>
               <a:t>Fix two: collect responses anonymously, and only after final marks are released.</a:t>
             </a:r>
-            <a:endParaRPr lang="en-US" sz="1300" dirty="0"/>
+            <a:endParaRPr lang="en-US" sz="1250" dirty="0"/>
           </a:p>
           <a:p>
             <a:pPr marL="342900" indent="-342900">
               <a:lnSpc>
-                <a:spcPct val="115000"/>
+                <a:spcPct val="120000"/>
               </a:lnSpc>
+              <a:spcAft>
+                <a:spcPts val="500"/>
+              </a:spcAft>
               <a:buSzPct val="100000"/>
               <a:buFont typeface="+mj-lt"/>
               <a:buAutoNum type="arabicPeriod" startAt="1"/>
             </a:pPr>
             <a:r>
-              <a:rPr lang="en-US" sz="1300" dirty="0">
-                <a:solidFill>
-                  <a:srgbClr val="374151"/>
-                </a:solidFill>
+              <a:rPr lang="en-US" sz="1250" dirty="0">
+                <a:solidFill>
+                  <a:srgbClr val="23282E"/>
+                </a:solidFill>
+                <a:latin typeface="Corbel" pitchFamily="34" charset="0"/>
+                <a:ea typeface="Corbel" pitchFamily="34" charset="-122"/>
+                <a:cs typeface="Corbel" pitchFamily="34" charset="-120"/>
               </a:rPr>
               <a:t>The information sheet must state plainly that participation has no bearing on assessment.</a:t>
             </a:r>
-            <a:endParaRPr lang="en-US" sz="1300" dirty="0"/>
+            <a:endParaRPr lang="en-US" sz="1250" dirty="0"/>
           </a:p>
           <a:p>
             <a:pPr marL="342900" indent="-342900">
               <a:lnSpc>
-                <a:spcPct val="115000"/>
+                <a:spcPct val="120000"/>
               </a:lnSpc>
+              <a:spcAft>
+                <a:spcPts val="500"/>
+              </a:spcAft>
               <a:buSzPct val="100000"/>
               <a:buFont typeface="+mj-lt"/>
               <a:buAutoNum type="arabicPeriod" startAt="1"/>
             </a:pPr>
             <a:r>
-              <a:rPr lang="en-US" sz="1300" dirty="0">
-                <a:solidFill>
-                  <a:srgbClr val="374151"/>
-                </a:solidFill>
+              <a:rPr lang="en-US" sz="1250" dirty="0">
+                <a:solidFill>
+                  <a:srgbClr val="23282E"/>
+                </a:solidFill>
+                <a:latin typeface="Corbel" pitchFamily="34" charset="0"/>
+                <a:ea typeface="Corbel" pitchFamily="34" charset="-122"/>
+                <a:cs typeface="Corbel" pitchFamily="34" charset="-120"/>
               </a:rPr>
               <a:t>Name the power relationship explicitly in the ethics application. Committees notice when it is left out.</a:t>
             </a:r>
-            <a:endParaRPr lang="en-US" sz="1300" dirty="0"/>
+            <a:endParaRPr lang="en-US" sz="1250" dirty="0"/>
           </a:p>
         </p:txBody>
       </p:sp>
@@ -4655,8 +4968,8 @@
         </p:nvSpPr>
         <p:spPr>
           <a:xfrm>
-            <a:off x="8503920" y="4709160"/>
-            <a:ext cx="800000" cy="300000"/>
+            <a:off x="566928" y="4700016"/>
+            <a:ext cx="914400" cy="274320"/>
           </a:xfrm>
           <a:prstGeom prst="rect">
             <a:avLst/>
@@ -4671,10 +4984,13 @@
           <a:bodyPr/>
           <a:lstStyle>
             <a:lvl1pPr>
-              <a:defRPr sz="1000">
-                <a:solidFill>
-                  <a:srgbClr val="6B7280"/>
-                </a:solidFill>
+              <a:defRPr sz="900">
+                <a:solidFill>
+                  <a:srgbClr val="5F6B76"/>
+                </a:solidFill>
+                <a:latin typeface="Corbel"/>
+                <a:ea typeface="Corbel"/>
+                <a:cs typeface="Corbel"/>
               </a:defRPr>
             </a:lvl1pPr>
           </a:lstStyle>
@@ -4721,8 +5037,8 @@
         </p:nvSpPr>
         <p:spPr>
           <a:xfrm>
-            <a:off x="502920" y="292608"/>
-            <a:ext cx="8046720" cy="228600"/>
+            <a:off x="566928" y="384048"/>
+            <a:ext cx="7772400" cy="237744"/>
           </a:xfrm>
           <a:prstGeom prst="rect">
             <a:avLst/>
@@ -4738,14 +5054,17 @@
               <a:buNone/>
             </a:pPr>
             <a:r>
-              <a:rPr lang="en-US" sz="1100" b="1" spc="150" kern="0" dirty="0">
-                <a:solidFill>
-                  <a:srgbClr val="00A86B"/>
-                </a:solidFill>
+              <a:rPr lang="en-US" sz="1000" spc="200" kern="0" dirty="0">
+                <a:solidFill>
+                  <a:srgbClr val="9A6A3C"/>
+                </a:solidFill>
+                <a:latin typeface="Corbel" pitchFamily="34" charset="0"/>
+                <a:ea typeface="Corbel" pitchFamily="34" charset="-122"/>
+                <a:cs typeface="Corbel" pitchFamily="34" charset="-120"/>
               </a:rPr>
               <a:t>UNIT 9  ·  WORKED EXAMPLE</a:t>
             </a:r>
-            <a:endParaRPr lang="en-US" sz="1100" dirty="0"/>
+            <a:endParaRPr lang="en-US" sz="1000" dirty="0"/>
           </a:p>
         </p:txBody>
       </p:sp>
@@ -4757,8 +5076,8 @@
         </p:nvSpPr>
         <p:spPr>
           <a:xfrm>
-            <a:off x="502920" y="548640"/>
-            <a:ext cx="8046720" cy="566928"/>
+            <a:off x="566928" y="658368"/>
+            <a:ext cx="7772400" cy="658368"/>
           </a:xfrm>
           <a:prstGeom prst="rect">
             <a:avLst/>
@@ -4771,17 +5090,23 @@
           <a:lstStyle/>
           <a:p>
             <a:pPr indent="0" marL="0">
+              <a:lnSpc>
+                <a:spcPct val="100000"/>
+              </a:lnSpc>
               <a:buNone/>
             </a:pPr>
             <a:r>
-              <a:rPr lang="en-US" sz="2300" b="1" dirty="0">
-                <a:solidFill>
-                  <a:srgbClr val="111827"/>
-                </a:solidFill>
+              <a:rPr lang="en-US" sz="2500" dirty="0">
+                <a:solidFill>
+                  <a:srgbClr val="1C3140"/>
+                </a:solidFill>
+                <a:latin typeface="Constantia" pitchFamily="34" charset="0"/>
+                <a:ea typeface="Constantia" pitchFamily="34" charset="-122"/>
+                <a:cs typeface="Constantia" pitchFamily="34" charset="-120"/>
               </a:rPr>
               <a:t>How a quotation identifies someone with no name attached</a:t>
             </a:r>
-            <a:endParaRPr lang="en-US" sz="2300" dirty="0"/>
+            <a:endParaRPr lang="en-US" sz="2500" dirty="0"/>
           </a:p>
         </p:txBody>
       </p:sp>
@@ -4793,21 +5118,16 @@
         </p:nvSpPr>
         <p:spPr>
           <a:xfrm>
-            <a:off x="502920" y="1207008"/>
-            <a:ext cx="8138160" cy="3200400"/>
+            <a:off x="566928" y="1335024"/>
+            <a:ext cx="566928" cy="20117"/>
           </a:xfrm>
           <a:prstGeom prst="rect">
             <a:avLst/>
           </a:prstGeom>
           <a:solidFill>
-            <a:srgbClr val="F3F7FC"/>
+            <a:srgbClr val="9A6A3C"/>
           </a:solidFill>
-          <a:ln w="9525">
-            <a:solidFill>
-              <a:srgbClr val="0066CC"/>
-            </a:solidFill>
-            <a:prstDash val="solid"/>
-          </a:ln>
+          <a:ln/>
         </p:spPr>
       </p:sp>
       <p:sp>
@@ -4818,8 +5138,8 @@
         </p:nvSpPr>
         <p:spPr>
           <a:xfrm>
-            <a:off x="731520" y="1371600"/>
-            <a:ext cx="7680960" cy="1005840"/>
+            <a:off x="566928" y="1645920"/>
+            <a:ext cx="8010144" cy="822960"/>
           </a:xfrm>
           <a:prstGeom prst="rect">
             <a:avLst/>
@@ -4832,156 +5152,195 @@
           <a:lstStyle/>
           <a:p>
             <a:pPr indent="0" marL="0">
+              <a:lnSpc>
+                <a:spcPct val="124000"/>
+              </a:lnSpc>
+              <a:buNone/>
+            </a:pPr>
+            <a:r>
+              <a:rPr lang="en-US" sz="1300" i="1" dirty="0">
+                <a:solidFill>
+                  <a:srgbClr val="5F6B76"/>
+                </a:solidFill>
+                <a:latin typeface="Constantia" pitchFamily="34" charset="0"/>
+                <a:ea typeface="Constantia" pitchFamily="34" charset="-122"/>
+                <a:cs typeface="Constantia" pitchFamily="34" charset="-120"/>
+              </a:rPr>
+              <a:t>A report on medical errors quotes: "As the only male theatre nurse at the district hospital, I felt I could not challenge the surgeon."</a:t>
+            </a:r>
+            <a:endParaRPr lang="en-US" sz="1300" dirty="0"/>
+          </a:p>
+        </p:txBody>
+      </p:sp>
+      <p:sp>
+        <p:nvSpPr>
+          <p:cNvPr id="6" name="Text 4"/>
+          <p:cNvSpPr/>
+          <p:nvPr/>
+        </p:nvSpPr>
+        <p:spPr>
+          <a:xfrm>
+            <a:off x="786384" y="2523744"/>
+            <a:ext cx="7406640" cy="1920240"/>
+          </a:xfrm>
+          <a:prstGeom prst="rect">
+            <a:avLst/>
+          </a:prstGeom>
+          <a:noFill/>
+          <a:ln/>
+        </p:spPr>
+        <p:txBody>
+          <a:bodyPr wrap="square" rtlCol="0" anchor="t"/>
+          <a:lstStyle/>
+          <a:p>
+            <a:pPr marL="342900" indent="-342900">
               <a:lnSpc>
                 <a:spcPct val="120000"/>
               </a:lnSpc>
-              <a:buNone/>
-            </a:pPr>
-            <a:r>
-              <a:rPr lang="en-US" sz="1400" i="1" dirty="0">
-                <a:solidFill>
-                  <a:srgbClr val="374151"/>
-                </a:solidFill>
-              </a:rPr>
-              <a:t>A report on medical errors quotes: "As the only male theatre nurse at the district hospital, I felt I could not challenge the surgeon."</a:t>
-            </a:r>
-            <a:endParaRPr lang="en-US" sz="1400" dirty="0"/>
-          </a:p>
-        </p:txBody>
-      </p:sp>
-      <p:sp>
-        <p:nvSpPr>
-          <p:cNvPr id="6" name="Text 4"/>
-          <p:cNvSpPr/>
-          <p:nvPr/>
-        </p:nvSpPr>
-        <p:spPr>
-          <a:xfrm>
-            <a:off x="868680" y="2395728"/>
-            <a:ext cx="7452360" cy="1920240"/>
-          </a:xfrm>
-          <a:prstGeom prst="rect">
-            <a:avLst/>
-          </a:prstGeom>
-          <a:noFill/>
-          <a:ln/>
-        </p:spPr>
-        <p:txBody>
-          <a:bodyPr wrap="square" rtlCol="0" anchor="t"/>
-          <a:lstStyle/>
-          <a:p>
-            <a:pPr marL="342900" indent="-342900">
-              <a:lnSpc>
-                <a:spcPct val="115000"/>
-              </a:lnSpc>
+              <a:spcAft>
+                <a:spcPts val="500"/>
+              </a:spcAft>
               <a:buSzPct val="100000"/>
               <a:buFont typeface="+mj-lt"/>
               <a:buAutoNum type="arabicPeriod" startAt="1"/>
             </a:pPr>
             <a:r>
-              <a:rPr lang="en-US" sz="1300" dirty="0">
-                <a:solidFill>
-                  <a:srgbClr val="374151"/>
-                </a:solidFill>
+              <a:rPr lang="en-US" sz="1250" dirty="0">
+                <a:solidFill>
+                  <a:srgbClr val="23282E"/>
+                </a:solidFill>
+                <a:latin typeface="Corbel" pitchFamily="34" charset="0"/>
+                <a:ea typeface="Corbel" pitchFamily="34" charset="-122"/>
+                <a:cs typeface="Corbel" pitchFamily="34" charset="-120"/>
               </a:rPr>
               <a:t>No name appears, yet anyone in that district can identify the speaker immediately.</a:t>
             </a:r>
-            <a:endParaRPr lang="en-US" sz="1300" dirty="0"/>
+            <a:endParaRPr lang="en-US" sz="1250" dirty="0"/>
           </a:p>
           <a:p>
             <a:pPr marL="342900" indent="-342900">
               <a:lnSpc>
-                <a:spcPct val="115000"/>
+                <a:spcPct val="120000"/>
               </a:lnSpc>
+              <a:spcAft>
+                <a:spcPts val="500"/>
+              </a:spcAft>
               <a:buSzPct val="100000"/>
               <a:buFont typeface="+mj-lt"/>
               <a:buAutoNum type="arabicPeriod" startAt="1"/>
             </a:pPr>
             <a:r>
-              <a:rPr lang="en-US" sz="1300" dirty="0">
-                <a:solidFill>
-                  <a:srgbClr val="374151"/>
-                </a:solidFill>
+              <a:rPr lang="en-US" sz="1250" dirty="0">
+                <a:solidFill>
+                  <a:srgbClr val="23282E"/>
+                </a:solidFill>
+                <a:latin typeface="Corbel" pitchFamily="34" charset="0"/>
+                <a:ea typeface="Corbel" pitchFamily="34" charset="-122"/>
+                <a:cs typeface="Corbel" pitchFamily="34" charset="-120"/>
               </a:rPr>
               <a:t>Role, gender, setting and seniority combine into an identifier even when each alone would not.</a:t>
             </a:r>
-            <a:endParaRPr lang="en-US" sz="1300" dirty="0"/>
+            <a:endParaRPr lang="en-US" sz="1250" dirty="0"/>
           </a:p>
           <a:p>
             <a:pPr marL="342900" indent="-342900">
               <a:lnSpc>
-                <a:spcPct val="115000"/>
+                <a:spcPct val="120000"/>
               </a:lnSpc>
+              <a:spcAft>
+                <a:spcPts val="500"/>
+              </a:spcAft>
               <a:buSzPct val="100000"/>
               <a:buFont typeface="+mj-lt"/>
               <a:buAutoNum type="arabicPeriod" startAt="1"/>
             </a:pPr>
             <a:r>
-              <a:rPr lang="en-US" sz="1300" dirty="0">
-                <a:solidFill>
-                  <a:srgbClr val="374151"/>
-                </a:solidFill>
+              <a:rPr lang="en-US" sz="1250" dirty="0">
+                <a:solidFill>
+                  <a:srgbClr val="23282E"/>
+                </a:solidFill>
+                <a:latin typeface="Corbel" pitchFamily="34" charset="0"/>
+                <a:ea typeface="Corbel" pitchFamily="34" charset="-122"/>
+                <a:cs typeface="Corbel" pitchFamily="34" charset="-120"/>
               </a:rPr>
               <a:t>The consequences here are real — this nurse could face professional retaliation.</a:t>
             </a:r>
-            <a:endParaRPr lang="en-US" sz="1300" dirty="0"/>
+            <a:endParaRPr lang="en-US" sz="1250" dirty="0"/>
           </a:p>
           <a:p>
             <a:pPr marL="342900" indent="-342900">
               <a:lnSpc>
-                <a:spcPct val="115000"/>
+                <a:spcPct val="120000"/>
               </a:lnSpc>
+              <a:spcAft>
+                <a:spcPts val="500"/>
+              </a:spcAft>
               <a:buSzPct val="100000"/>
               <a:buFont typeface="+mj-lt"/>
               <a:buAutoNum type="arabicPeriod" startAt="1"/>
             </a:pPr>
             <a:r>
-              <a:rPr lang="en-US" sz="1300" dirty="0">
-                <a:solidFill>
-                  <a:srgbClr val="374151"/>
-                </a:solidFill>
+              <a:rPr lang="en-US" sz="1250" dirty="0">
+                <a:solidFill>
+                  <a:srgbClr val="23282E"/>
+                </a:solidFill>
+                <a:latin typeface="Corbel" pitchFamily="34" charset="0"/>
+                <a:ea typeface="Corbel" pitchFamily="34" charset="-122"/>
+                <a:cs typeface="Corbel" pitchFamily="34" charset="-120"/>
               </a:rPr>
               <a:t>Options: remove the role detail, aggregate the setting to "a district hospital in the region", or paraphrase rather than quote.</a:t>
             </a:r>
-            <a:endParaRPr lang="en-US" sz="1300" dirty="0"/>
+            <a:endParaRPr lang="en-US" sz="1250" dirty="0"/>
           </a:p>
           <a:p>
             <a:pPr marL="342900" indent="-342900">
               <a:lnSpc>
-                <a:spcPct val="115000"/>
+                <a:spcPct val="120000"/>
               </a:lnSpc>
+              <a:spcAft>
+                <a:spcPts val="500"/>
+              </a:spcAft>
               <a:buSzPct val="100000"/>
               <a:buFont typeface="+mj-lt"/>
               <a:buAutoNum type="arabicPeriod" startAt="1"/>
             </a:pPr>
             <a:r>
-              <a:rPr lang="en-US" sz="1300" dirty="0">
-                <a:solidFill>
-                  <a:srgbClr val="374151"/>
-                </a:solidFill>
+              <a:rPr lang="en-US" sz="1250" dirty="0">
+                <a:solidFill>
+                  <a:srgbClr val="23282E"/>
+                </a:solidFill>
+                <a:latin typeface="Corbel" pitchFamily="34" charset="0"/>
+                <a:ea typeface="Corbel" pitchFamily="34" charset="-122"/>
+                <a:cs typeface="Corbel" pitchFamily="34" charset="-120"/>
               </a:rPr>
               <a:t>Where the detail is essential to the point, go back to the participant and ask before publishing.</a:t>
             </a:r>
-            <a:endParaRPr lang="en-US" sz="1300" dirty="0"/>
+            <a:endParaRPr lang="en-US" sz="1250" dirty="0"/>
           </a:p>
           <a:p>
             <a:pPr marL="342900" indent="-342900">
               <a:lnSpc>
-                <a:spcPct val="115000"/>
+                <a:spcPct val="120000"/>
               </a:lnSpc>
+              <a:spcAft>
+                <a:spcPts val="500"/>
+              </a:spcAft>
               <a:buSzPct val="100000"/>
               <a:buFont typeface="+mj-lt"/>
               <a:buAutoNum type="arabicPeriod" startAt="1"/>
             </a:pPr>
             <a:r>
-              <a:rPr lang="en-US" sz="1300" dirty="0">
-                <a:solidFill>
-                  <a:srgbClr val="374151"/>
-                </a:solidFill>
+              <a:rPr lang="en-US" sz="1250" dirty="0">
+                <a:solidFill>
+                  <a:srgbClr val="23282E"/>
+                </a:solidFill>
+                <a:latin typeface="Corbel" pitchFamily="34" charset="0"/>
+                <a:ea typeface="Corbel" pitchFamily="34" charset="-122"/>
+                <a:cs typeface="Corbel" pitchFamily="34" charset="-120"/>
               </a:rPr>
               <a:t>Say in the information sheet how quotations will be handled, so consent covers what you actually do.</a:t>
             </a:r>
-            <a:endParaRPr lang="en-US" sz="1300" dirty="0"/>
+            <a:endParaRPr lang="en-US" sz="1250" dirty="0"/>
           </a:p>
         </p:txBody>
       </p:sp>
@@ -4997,8 +5356,8 @@
         </p:nvSpPr>
         <p:spPr>
           <a:xfrm>
-            <a:off x="8503920" y="4709160"/>
-            <a:ext cx="800000" cy="300000"/>
+            <a:off x="566928" y="4700016"/>
+            <a:ext cx="914400" cy="274320"/>
           </a:xfrm>
           <a:prstGeom prst="rect">
             <a:avLst/>
@@ -5013,10 +5372,13 @@
           <a:bodyPr/>
           <a:lstStyle>
             <a:lvl1pPr>
-              <a:defRPr sz="1000">
-                <a:solidFill>
-                  <a:srgbClr val="6B7280"/>
-                </a:solidFill>
+              <a:defRPr sz="900">
+                <a:solidFill>
+                  <a:srgbClr val="5F6B76"/>
+                </a:solidFill>
+                <a:latin typeface="Corbel"/>
+                <a:ea typeface="Corbel"/>
+                <a:cs typeface="Corbel"/>
               </a:defRPr>
             </a:lvl1pPr>
           </a:lstStyle>
@@ -5063,8 +5425,8 @@
         </p:nvSpPr>
         <p:spPr>
           <a:xfrm>
-            <a:off x="502920" y="292608"/>
-            <a:ext cx="8046720" cy="228600"/>
+            <a:off x="566928" y="384048"/>
+            <a:ext cx="7772400" cy="237744"/>
           </a:xfrm>
           <a:prstGeom prst="rect">
             <a:avLst/>
@@ -5080,14 +5442,17 @@
               <a:buNone/>
             </a:pPr>
             <a:r>
-              <a:rPr lang="en-US" sz="1100" b="1" spc="150" kern="0" dirty="0">
-                <a:solidFill>
-                  <a:srgbClr val="0066CC"/>
-                </a:solidFill>
+              <a:rPr lang="en-US" sz="1000" spc="200" kern="0" dirty="0">
+                <a:solidFill>
+                  <a:srgbClr val="9A6A3C"/>
+                </a:solidFill>
+                <a:latin typeface="Corbel" pitchFamily="34" charset="0"/>
+                <a:ea typeface="Corbel" pitchFamily="34" charset="-122"/>
+                <a:cs typeface="Corbel" pitchFamily="34" charset="-120"/>
               </a:rPr>
               <a:t>UNIT 9</a:t>
             </a:r>
-            <a:endParaRPr lang="en-US" sz="1100" dirty="0"/>
+            <a:endParaRPr lang="en-US" sz="1000" dirty="0"/>
           </a:p>
         </p:txBody>
       </p:sp>
@@ -5099,8 +5464,8 @@
         </p:nvSpPr>
         <p:spPr>
           <a:xfrm>
-            <a:off x="502920" y="548640"/>
-            <a:ext cx="8046720" cy="640080"/>
+            <a:off x="566928" y="658368"/>
+            <a:ext cx="7772400" cy="658368"/>
           </a:xfrm>
           <a:prstGeom prst="rect">
             <a:avLst/>
@@ -5113,30 +5478,56 @@
           <a:lstStyle/>
           <a:p>
             <a:pPr indent="0" marL="0">
+              <a:lnSpc>
+                <a:spcPct val="100000"/>
+              </a:lnSpc>
               <a:buNone/>
             </a:pPr>
             <a:r>
-              <a:rPr lang="en-US" sz="2400" b="1" dirty="0">
-                <a:solidFill>
-                  <a:srgbClr val="111827"/>
-                </a:solidFill>
+              <a:rPr lang="en-US" sz="2500" dirty="0">
+                <a:solidFill>
+                  <a:srgbClr val="1C3140"/>
+                </a:solidFill>
+                <a:latin typeface="Constantia" pitchFamily="34" charset="0"/>
+                <a:ea typeface="Constantia" pitchFamily="34" charset="-122"/>
+                <a:cs typeface="Constantia" pitchFamily="34" charset="-120"/>
               </a:rPr>
               <a:t>Key terms (1/2)</a:t>
             </a:r>
-            <a:endParaRPr lang="en-US" sz="2400" dirty="0"/>
-          </a:p>
-        </p:txBody>
-      </p:sp>
-      <p:sp>
-        <p:nvSpPr>
-          <p:cNvPr id="4" name="Text 2"/>
+            <a:endParaRPr lang="en-US" sz="2500" dirty="0"/>
+          </a:p>
+        </p:txBody>
+      </p:sp>
+      <p:sp>
+        <p:nvSpPr>
+          <p:cNvPr id="4" name="Shape 2"/>
           <p:cNvSpPr/>
           <p:nvPr/>
         </p:nvSpPr>
         <p:spPr>
           <a:xfrm>
-            <a:off x="685800" y="1325880"/>
-            <a:ext cx="7772400" cy="3200400"/>
+            <a:off x="566928" y="1335024"/>
+            <a:ext cx="566928" cy="20117"/>
+          </a:xfrm>
+          <a:prstGeom prst="rect">
+            <a:avLst/>
+          </a:prstGeom>
+          <a:solidFill>
+            <a:srgbClr val="9A6A3C"/>
+          </a:solidFill>
+          <a:ln/>
+        </p:spPr>
+      </p:sp>
+      <p:sp>
+        <p:nvSpPr>
+          <p:cNvPr id="5" name="Text 3"/>
+          <p:cNvSpPr/>
+          <p:nvPr/>
+        </p:nvSpPr>
+        <p:spPr>
+          <a:xfrm>
+            <a:off x="713232" y="1664208"/>
+            <a:ext cx="7498080" cy="2788920"/>
           </a:xfrm>
           <a:prstGeom prst="rect">
             <a:avLst/>
@@ -5150,107 +5541,122 @@
           <a:p>
             <a:pPr marL="342900" indent="-342900">
               <a:lnSpc>
-                <a:spcPct val="125000"/>
+                <a:spcPct val="130000"/>
               </a:lnSpc>
               <a:spcAft>
-                <a:spcPts val="800"/>
+                <a:spcPts val="1100"/>
               </a:spcAft>
               <a:buSzPct val="100000"/>
-              <a:buChar char="•"/>
-            </a:pPr>
-            <a:r>
-              <a:rPr lang="en-US" sz="1700" dirty="0">
-                <a:solidFill>
-                  <a:srgbClr val="374151"/>
-                </a:solidFill>
+              <a:buChar char="–"/>
+            </a:pPr>
+            <a:r>
+              <a:rPr lang="en-US" sz="1650" dirty="0">
+                <a:solidFill>
+                  <a:srgbClr val="23282E"/>
+                </a:solidFill>
+                <a:latin typeface="Corbel" pitchFamily="34" charset="0"/>
+                <a:ea typeface="Corbel" pitchFamily="34" charset="-122"/>
+                <a:cs typeface="Corbel" pitchFamily="34" charset="-120"/>
               </a:rPr>
               <a:t>Autonomy — The principle that competent people decide for themselves whether to participate.</a:t>
             </a:r>
-            <a:endParaRPr lang="en-US" sz="1700" dirty="0"/>
+            <a:endParaRPr lang="en-US" sz="1650" dirty="0"/>
           </a:p>
           <a:p>
             <a:pPr marL="342900" indent="-342900">
               <a:lnSpc>
-                <a:spcPct val="125000"/>
+                <a:spcPct val="130000"/>
               </a:lnSpc>
               <a:spcAft>
-                <a:spcPts val="800"/>
+                <a:spcPts val="1100"/>
               </a:spcAft>
               <a:buSzPct val="100000"/>
-              <a:buChar char="•"/>
-            </a:pPr>
-            <a:r>
-              <a:rPr lang="en-US" sz="1700" dirty="0">
-                <a:solidFill>
-                  <a:srgbClr val="374151"/>
-                </a:solidFill>
+              <a:buChar char="–"/>
+            </a:pPr>
+            <a:r>
+              <a:rPr lang="en-US" sz="1650" dirty="0">
+                <a:solidFill>
+                  <a:srgbClr val="23282E"/>
+                </a:solidFill>
+                <a:latin typeface="Corbel" pitchFamily="34" charset="0"/>
+                <a:ea typeface="Corbel" pitchFamily="34" charset="-122"/>
+                <a:cs typeface="Corbel" pitchFamily="34" charset="-120"/>
               </a:rPr>
               <a:t>Beneficence — The obligation to maximise benefit and minimise harm to participants.</a:t>
             </a:r>
-            <a:endParaRPr lang="en-US" sz="1700" dirty="0"/>
+            <a:endParaRPr lang="en-US" sz="1650" dirty="0"/>
           </a:p>
           <a:p>
             <a:pPr marL="342900" indent="-342900">
               <a:lnSpc>
-                <a:spcPct val="125000"/>
+                <a:spcPct val="130000"/>
               </a:lnSpc>
               <a:spcAft>
-                <a:spcPts val="800"/>
+                <a:spcPts val="1100"/>
               </a:spcAft>
               <a:buSzPct val="100000"/>
-              <a:buChar char="•"/>
-            </a:pPr>
-            <a:r>
-              <a:rPr lang="en-US" sz="1700" dirty="0">
-                <a:solidFill>
-                  <a:srgbClr val="374151"/>
-                </a:solidFill>
+              <a:buChar char="–"/>
+            </a:pPr>
+            <a:r>
+              <a:rPr lang="en-US" sz="1650" dirty="0">
+                <a:solidFill>
+                  <a:srgbClr val="23282E"/>
+                </a:solidFill>
+                <a:latin typeface="Corbel" pitchFamily="34" charset="0"/>
+                <a:ea typeface="Corbel" pitchFamily="34" charset="-122"/>
+                <a:cs typeface="Corbel" pitchFamily="34" charset="-120"/>
               </a:rPr>
               <a:t>Justice — Fair distribution of the burdens and benefits of research across groups.</a:t>
             </a:r>
-            <a:endParaRPr lang="en-US" sz="1700" dirty="0"/>
+            <a:endParaRPr lang="en-US" sz="1650" dirty="0"/>
           </a:p>
           <a:p>
             <a:pPr marL="342900" indent="-342900">
               <a:lnSpc>
-                <a:spcPct val="125000"/>
+                <a:spcPct val="130000"/>
               </a:lnSpc>
               <a:spcAft>
-                <a:spcPts val="800"/>
+                <a:spcPts val="1100"/>
               </a:spcAft>
               <a:buSzPct val="100000"/>
-              <a:buChar char="•"/>
-            </a:pPr>
-            <a:r>
-              <a:rPr lang="en-US" sz="1700" dirty="0">
-                <a:solidFill>
-                  <a:srgbClr val="374151"/>
-                </a:solidFill>
+              <a:buChar char="–"/>
+            </a:pPr>
+            <a:r>
+              <a:rPr lang="en-US" sz="1650" dirty="0">
+                <a:solidFill>
+                  <a:srgbClr val="23282E"/>
+                </a:solidFill>
+                <a:latin typeface="Corbel" pitchFamily="34" charset="0"/>
+                <a:ea typeface="Corbel" pitchFamily="34" charset="-122"/>
+                <a:cs typeface="Corbel" pitchFamily="34" charset="-120"/>
               </a:rPr>
               <a:t>Assent — A child's own agreement to take part, alongside a guardian's consent.</a:t>
             </a:r>
-            <a:endParaRPr lang="en-US" sz="1700" dirty="0"/>
+            <a:endParaRPr lang="en-US" sz="1650" dirty="0"/>
           </a:p>
           <a:p>
             <a:pPr marL="342900" indent="-342900">
               <a:lnSpc>
-                <a:spcPct val="125000"/>
+                <a:spcPct val="130000"/>
               </a:lnSpc>
               <a:spcAft>
-                <a:spcPts val="800"/>
+                <a:spcPts val="1100"/>
               </a:spcAft>
               <a:buSzPct val="100000"/>
-              <a:buChar char="•"/>
-            </a:pPr>
-            <a:r>
-              <a:rPr lang="en-US" sz="1700" dirty="0">
-                <a:solidFill>
-                  <a:srgbClr val="374151"/>
-                </a:solidFill>
+              <a:buChar char="–"/>
+            </a:pPr>
+            <a:r>
+              <a:rPr lang="en-US" sz="1650" dirty="0">
+                <a:solidFill>
+                  <a:srgbClr val="23282E"/>
+                </a:solidFill>
+                <a:latin typeface="Corbel" pitchFamily="34" charset="0"/>
+                <a:ea typeface="Corbel" pitchFamily="34" charset="-122"/>
+                <a:cs typeface="Corbel" pitchFamily="34" charset="-120"/>
               </a:rPr>
               <a:t>Anonymity — Data cannot be linked to an individual by anyone, including the researcher.</a:t>
             </a:r>
-            <a:endParaRPr lang="en-US" sz="1700" dirty="0"/>
+            <a:endParaRPr lang="en-US" sz="1650" dirty="0"/>
           </a:p>
         </p:txBody>
       </p:sp>
@@ -5266,8 +5672,8 @@
         </p:nvSpPr>
         <p:spPr>
           <a:xfrm>
-            <a:off x="8503920" y="4709160"/>
-            <a:ext cx="800000" cy="300000"/>
+            <a:off x="566928" y="4700016"/>
+            <a:ext cx="914400" cy="274320"/>
           </a:xfrm>
           <a:prstGeom prst="rect">
             <a:avLst/>
@@ -5282,10 +5688,13 @@
           <a:bodyPr/>
           <a:lstStyle>
             <a:lvl1pPr>
-              <a:defRPr sz="1000">
-                <a:solidFill>
-                  <a:srgbClr val="6B7280"/>
-                </a:solidFill>
+              <a:defRPr sz="900">
+                <a:solidFill>
+                  <a:srgbClr val="5F6B76"/>
+                </a:solidFill>
+                <a:latin typeface="Corbel"/>
+                <a:ea typeface="Corbel"/>
+                <a:cs typeface="Corbel"/>
               </a:defRPr>
             </a:lvl1pPr>
           </a:lstStyle>
@@ -5332,8 +5741,8 @@
         </p:nvSpPr>
         <p:spPr>
           <a:xfrm>
-            <a:off x="502920" y="292608"/>
-            <a:ext cx="8046720" cy="228600"/>
+            <a:off x="566928" y="384048"/>
+            <a:ext cx="7772400" cy="237744"/>
           </a:xfrm>
           <a:prstGeom prst="rect">
             <a:avLst/>
@@ -5349,14 +5758,17 @@
               <a:buNone/>
             </a:pPr>
             <a:r>
-              <a:rPr lang="en-US" sz="1100" b="1" spc="150" kern="0" dirty="0">
-                <a:solidFill>
-                  <a:srgbClr val="0066CC"/>
-                </a:solidFill>
+              <a:rPr lang="en-US" sz="1000" spc="200" kern="0" dirty="0">
+                <a:solidFill>
+                  <a:srgbClr val="9A6A3C"/>
+                </a:solidFill>
+                <a:latin typeface="Corbel" pitchFamily="34" charset="0"/>
+                <a:ea typeface="Corbel" pitchFamily="34" charset="-122"/>
+                <a:cs typeface="Corbel" pitchFamily="34" charset="-120"/>
               </a:rPr>
               <a:t>UNIT 9</a:t>
             </a:r>
-            <a:endParaRPr lang="en-US" sz="1100" dirty="0"/>
+            <a:endParaRPr lang="en-US" sz="1000" dirty="0"/>
           </a:p>
         </p:txBody>
       </p:sp>
@@ -5368,8 +5780,8 @@
         </p:nvSpPr>
         <p:spPr>
           <a:xfrm>
-            <a:off x="502920" y="548640"/>
-            <a:ext cx="8046720" cy="640080"/>
+            <a:off x="566928" y="658368"/>
+            <a:ext cx="7772400" cy="658368"/>
           </a:xfrm>
           <a:prstGeom prst="rect">
             <a:avLst/>
@@ -5382,30 +5794,56 @@
           <a:lstStyle/>
           <a:p>
             <a:pPr indent="0" marL="0">
+              <a:lnSpc>
+                <a:spcPct val="100000"/>
+              </a:lnSpc>
               <a:buNone/>
             </a:pPr>
             <a:r>
-              <a:rPr lang="en-US" sz="2400" b="1" dirty="0">
-                <a:solidFill>
-                  <a:srgbClr val="111827"/>
-                </a:solidFill>
+              <a:rPr lang="en-US" sz="2500" dirty="0">
+                <a:solidFill>
+                  <a:srgbClr val="1C3140"/>
+                </a:solidFill>
+                <a:latin typeface="Constantia" pitchFamily="34" charset="0"/>
+                <a:ea typeface="Constantia" pitchFamily="34" charset="-122"/>
+                <a:cs typeface="Constantia" pitchFamily="34" charset="-120"/>
               </a:rPr>
               <a:t>Key terms (2/2)</a:t>
             </a:r>
-            <a:endParaRPr lang="en-US" sz="2400" dirty="0"/>
-          </a:p>
-        </p:txBody>
-      </p:sp>
-      <p:sp>
-        <p:nvSpPr>
-          <p:cNvPr id="4" name="Text 2"/>
+            <a:endParaRPr lang="en-US" sz="2500" dirty="0"/>
+          </a:p>
+        </p:txBody>
+      </p:sp>
+      <p:sp>
+        <p:nvSpPr>
+          <p:cNvPr id="4" name="Shape 2"/>
           <p:cNvSpPr/>
           <p:nvPr/>
         </p:nvSpPr>
         <p:spPr>
           <a:xfrm>
-            <a:off x="685800" y="1325880"/>
-            <a:ext cx="7772400" cy="3200400"/>
+            <a:off x="566928" y="1335024"/>
+            <a:ext cx="566928" cy="20117"/>
+          </a:xfrm>
+          <a:prstGeom prst="rect">
+            <a:avLst/>
+          </a:prstGeom>
+          <a:solidFill>
+            <a:srgbClr val="9A6A3C"/>
+          </a:solidFill>
+          <a:ln/>
+        </p:spPr>
+      </p:sp>
+      <p:sp>
+        <p:nvSpPr>
+          <p:cNvPr id="5" name="Text 3"/>
+          <p:cNvSpPr/>
+          <p:nvPr/>
+        </p:nvSpPr>
+        <p:spPr>
+          <a:xfrm>
+            <a:off x="713232" y="1664208"/>
+            <a:ext cx="7498080" cy="2788920"/>
           </a:xfrm>
           <a:prstGeom prst="rect">
             <a:avLst/>
@@ -5419,65 +5857,74 @@
           <a:p>
             <a:pPr marL="342900" indent="-342900">
               <a:lnSpc>
-                <a:spcPct val="125000"/>
+                <a:spcPct val="130000"/>
               </a:lnSpc>
               <a:spcAft>
-                <a:spcPts val="800"/>
+                <a:spcPts val="1100"/>
               </a:spcAft>
               <a:buSzPct val="100000"/>
-              <a:buChar char="•"/>
-            </a:pPr>
-            <a:r>
-              <a:rPr lang="en-US" sz="1700" dirty="0">
-                <a:solidFill>
-                  <a:srgbClr val="374151"/>
-                </a:solidFill>
+              <a:buChar char="–"/>
+            </a:pPr>
+            <a:r>
+              <a:rPr lang="en-US" sz="1650" dirty="0">
+                <a:solidFill>
+                  <a:srgbClr val="23282E"/>
+                </a:solidFill>
+                <a:latin typeface="Corbel" pitchFamily="34" charset="0"/>
+                <a:ea typeface="Corbel" pitchFamily="34" charset="-122"/>
+                <a:cs typeface="Corbel" pitchFamily="34" charset="-120"/>
               </a:rPr>
               <a:t>Confidentiality — Identifiable data exist but access is restricted and disclosure prevented.</a:t>
             </a:r>
-            <a:endParaRPr lang="en-US" sz="1700" dirty="0"/>
+            <a:endParaRPr lang="en-US" sz="1650" dirty="0"/>
           </a:p>
           <a:p>
             <a:pPr marL="342900" indent="-342900">
               <a:lnSpc>
-                <a:spcPct val="125000"/>
+                <a:spcPct val="130000"/>
               </a:lnSpc>
               <a:spcAft>
-                <a:spcPts val="800"/>
+                <a:spcPts val="1100"/>
               </a:spcAft>
               <a:buSzPct val="100000"/>
-              <a:buChar char="•"/>
-            </a:pPr>
-            <a:r>
-              <a:rPr lang="en-US" sz="1700" dirty="0">
-                <a:solidFill>
-                  <a:srgbClr val="374151"/>
-                </a:solidFill>
+              <a:buChar char="–"/>
+            </a:pPr>
+            <a:r>
+              <a:rPr lang="en-US" sz="1650" dirty="0">
+                <a:solidFill>
+                  <a:srgbClr val="23282E"/>
+                </a:solidFill>
+                <a:latin typeface="Corbel" pitchFamily="34" charset="0"/>
+                <a:ea typeface="Corbel" pitchFamily="34" charset="-122"/>
+                <a:cs typeface="Corbel" pitchFamily="34" charset="-120"/>
               </a:rPr>
               <a:t>Gift authorship — Naming as author someone who has not met the criteria for authorship.</a:t>
             </a:r>
-            <a:endParaRPr lang="en-US" sz="1700" dirty="0"/>
+            <a:endParaRPr lang="en-US" sz="1650" dirty="0"/>
           </a:p>
           <a:p>
             <a:pPr marL="342900" indent="-342900">
               <a:lnSpc>
-                <a:spcPct val="125000"/>
+                <a:spcPct val="130000"/>
               </a:lnSpc>
               <a:spcAft>
-                <a:spcPts val="800"/>
+                <a:spcPts val="1100"/>
               </a:spcAft>
               <a:buSzPct val="100000"/>
-              <a:buChar char="•"/>
-            </a:pPr>
-            <a:r>
-              <a:rPr lang="en-US" sz="1700" dirty="0">
-                <a:solidFill>
-                  <a:srgbClr val="374151"/>
-                </a:solidFill>
+              <a:buChar char="–"/>
+            </a:pPr>
+            <a:r>
+              <a:rPr lang="en-US" sz="1650" dirty="0">
+                <a:solidFill>
+                  <a:srgbClr val="23282E"/>
+                </a:solidFill>
+                <a:latin typeface="Corbel" pitchFamily="34" charset="0"/>
+                <a:ea typeface="Corbel" pitchFamily="34" charset="-122"/>
+                <a:cs typeface="Corbel" pitchFamily="34" charset="-120"/>
               </a:rPr>
               <a:t>Equipoise — Genuine uncertainty about which trial arm is superior, the ethical basis for randomising.</a:t>
             </a:r>
-            <a:endParaRPr lang="en-US" sz="1700" dirty="0"/>
+            <a:endParaRPr lang="en-US" sz="1650" dirty="0"/>
           </a:p>
         </p:txBody>
       </p:sp>
@@ -5493,8 +5940,8 @@
         </p:nvSpPr>
         <p:spPr>
           <a:xfrm>
-            <a:off x="8503920" y="4709160"/>
-            <a:ext cx="800000" cy="300000"/>
+            <a:off x="566928" y="4700016"/>
+            <a:ext cx="914400" cy="274320"/>
           </a:xfrm>
           <a:prstGeom prst="rect">
             <a:avLst/>
@@ -5509,10 +5956,13 @@
           <a:bodyPr/>
           <a:lstStyle>
             <a:lvl1pPr>
-              <a:defRPr sz="1000">
-                <a:solidFill>
-                  <a:srgbClr val="6B7280"/>
-                </a:solidFill>
+              <a:defRPr sz="900">
+                <a:solidFill>
+                  <a:srgbClr val="5F6B76"/>
+                </a:solidFill>
+                <a:latin typeface="Corbel"/>
+                <a:ea typeface="Corbel"/>
+                <a:cs typeface="Corbel"/>
               </a:defRPr>
             </a:lvl1pPr>
           </a:lstStyle>
@@ -5559,8 +6009,8 @@
         </p:nvSpPr>
         <p:spPr>
           <a:xfrm>
-            <a:off x="502920" y="292608"/>
-            <a:ext cx="8046720" cy="228600"/>
+            <a:off x="566928" y="384048"/>
+            <a:ext cx="7772400" cy="237744"/>
           </a:xfrm>
           <a:prstGeom prst="rect">
             <a:avLst/>
@@ -5576,14 +6026,17 @@
               <a:buNone/>
             </a:pPr>
             <a:r>
-              <a:rPr lang="en-US" sz="1100" b="1" spc="150" kern="0" dirty="0">
-                <a:solidFill>
-                  <a:srgbClr val="0066CC"/>
-                </a:solidFill>
+              <a:rPr lang="en-US" sz="1000" spc="200" kern="0" dirty="0">
+                <a:solidFill>
+                  <a:srgbClr val="9A6A3C"/>
+                </a:solidFill>
+                <a:latin typeface="Corbel" pitchFamily="34" charset="0"/>
+                <a:ea typeface="Corbel" pitchFamily="34" charset="-122"/>
+                <a:cs typeface="Corbel" pitchFamily="34" charset="-120"/>
               </a:rPr>
               <a:t>UNIT 9</a:t>
             </a:r>
-            <a:endParaRPr lang="en-US" sz="1100" dirty="0"/>
+            <a:endParaRPr lang="en-US" sz="1000" dirty="0"/>
           </a:p>
         </p:txBody>
       </p:sp>
@@ -5595,8 +6048,8 @@
         </p:nvSpPr>
         <p:spPr>
           <a:xfrm>
-            <a:off x="502920" y="548640"/>
-            <a:ext cx="8046720" cy="640080"/>
+            <a:off x="566928" y="658368"/>
+            <a:ext cx="7772400" cy="658368"/>
           </a:xfrm>
           <a:prstGeom prst="rect">
             <a:avLst/>
@@ -5609,30 +6062,56 @@
           <a:lstStyle/>
           <a:p>
             <a:pPr indent="0" marL="0">
+              <a:lnSpc>
+                <a:spcPct val="100000"/>
+              </a:lnSpc>
               <a:buNone/>
             </a:pPr>
             <a:r>
-              <a:rPr lang="en-US" sz="2400" b="1" dirty="0">
-                <a:solidFill>
-                  <a:srgbClr val="111827"/>
-                </a:solidFill>
+              <a:rPr lang="en-US" sz="2500" dirty="0">
+                <a:solidFill>
+                  <a:srgbClr val="1C3140"/>
+                </a:solidFill>
+                <a:latin typeface="Constantia" pitchFamily="34" charset="0"/>
+                <a:ea typeface="Constantia" pitchFamily="34" charset="-122"/>
+                <a:cs typeface="Constantia" pitchFamily="34" charset="-120"/>
               </a:rPr>
               <a:t>What you will be able to do</a:t>
             </a:r>
-            <a:endParaRPr lang="en-US" sz="2400" dirty="0"/>
-          </a:p>
-        </p:txBody>
-      </p:sp>
-      <p:sp>
-        <p:nvSpPr>
-          <p:cNvPr id="4" name="Text 2"/>
+            <a:endParaRPr lang="en-US" sz="2500" dirty="0"/>
+          </a:p>
+        </p:txBody>
+      </p:sp>
+      <p:sp>
+        <p:nvSpPr>
+          <p:cNvPr id="4" name="Shape 2"/>
           <p:cNvSpPr/>
           <p:nvPr/>
         </p:nvSpPr>
         <p:spPr>
           <a:xfrm>
-            <a:off x="685800" y="1325880"/>
-            <a:ext cx="7772400" cy="3200400"/>
+            <a:off x="566928" y="1335024"/>
+            <a:ext cx="566928" cy="20117"/>
+          </a:xfrm>
+          <a:prstGeom prst="rect">
+            <a:avLst/>
+          </a:prstGeom>
+          <a:solidFill>
+            <a:srgbClr val="9A6A3C"/>
+          </a:solidFill>
+          <a:ln/>
+        </p:spPr>
+      </p:sp>
+      <p:sp>
+        <p:nvSpPr>
+          <p:cNvPr id="5" name="Text 3"/>
+          <p:cNvSpPr/>
+          <p:nvPr/>
+        </p:nvSpPr>
+        <p:spPr>
+          <a:xfrm>
+            <a:off x="713232" y="1664208"/>
+            <a:ext cx="7498080" cy="2788920"/>
           </a:xfrm>
           <a:prstGeom prst="rect">
             <a:avLst/>
@@ -5646,19 +6125,22 @@
           <a:p>
             <a:pPr marL="342900" indent="-342900">
               <a:lnSpc>
-                <a:spcPct val="125000"/>
+                <a:spcPct val="130000"/>
               </a:lnSpc>
               <a:spcAft>
-                <a:spcPts val="800"/>
+                <a:spcPts val="1100"/>
               </a:spcAft>
               <a:buSzPct val="100000"/>
-              <a:buChar char="•"/>
+              <a:buChar char="–"/>
             </a:pPr>
             <a:r>
               <a:rPr lang="en-US" sz="1800" dirty="0">
                 <a:solidFill>
-                  <a:srgbClr val="374151"/>
-                </a:solidFill>
+                  <a:srgbClr val="23282E"/>
+                </a:solidFill>
+                <a:latin typeface="Corbel" pitchFamily="34" charset="0"/>
+                <a:ea typeface="Corbel" pitchFamily="34" charset="-122"/>
+                <a:cs typeface="Corbel" pitchFamily="34" charset="-120"/>
               </a:rPr>
               <a:t>State the four principles of research ethics and apply them to a scenario</a:t>
             </a:r>
@@ -5667,19 +6149,22 @@
           <a:p>
             <a:pPr marL="342900" indent="-342900">
               <a:lnSpc>
-                <a:spcPct val="125000"/>
+                <a:spcPct val="130000"/>
               </a:lnSpc>
               <a:spcAft>
-                <a:spcPts val="800"/>
+                <a:spcPts val="1100"/>
               </a:spcAft>
               <a:buSzPct val="100000"/>
-              <a:buChar char="•"/>
+              <a:buChar char="–"/>
             </a:pPr>
             <a:r>
               <a:rPr lang="en-US" sz="1800" dirty="0">
                 <a:solidFill>
-                  <a:srgbClr val="374151"/>
-                </a:solidFill>
+                  <a:srgbClr val="23282E"/>
+                </a:solidFill>
+                <a:latin typeface="Corbel" pitchFamily="34" charset="0"/>
+                <a:ea typeface="Corbel" pitchFamily="34" charset="-122"/>
+                <a:cs typeface="Corbel" pitchFamily="34" charset="-120"/>
               </a:rPr>
               <a:t>Explain what makes consent genuinely informed, voluntary and documented</a:t>
             </a:r>
@@ -5688,19 +6173,22 @@
           <a:p>
             <a:pPr marL="342900" indent="-342900">
               <a:lnSpc>
-                <a:spcPct val="125000"/>
+                <a:spcPct val="130000"/>
               </a:lnSpc>
               <a:spcAft>
-                <a:spcPts val="800"/>
+                <a:spcPts val="1100"/>
               </a:spcAft>
               <a:buSzPct val="100000"/>
-              <a:buChar char="•"/>
+              <a:buChar char="–"/>
             </a:pPr>
             <a:r>
               <a:rPr lang="en-US" sz="1800" dirty="0">
                 <a:solidFill>
-                  <a:srgbClr val="374151"/>
-                </a:solidFill>
+                  <a:srgbClr val="23282E"/>
+                </a:solidFill>
+                <a:latin typeface="Corbel" pitchFamily="34" charset="0"/>
+                <a:ea typeface="Corbel" pitchFamily="34" charset="-122"/>
+                <a:cs typeface="Corbel" pitchFamily="34" charset="-120"/>
               </a:rPr>
               <a:t>Assemble an ethics application and anticipate what a committee will query</a:t>
             </a:r>
@@ -5709,19 +6197,22 @@
           <a:p>
             <a:pPr marL="342900" indent="-342900">
               <a:lnSpc>
-                <a:spcPct val="125000"/>
+                <a:spcPct val="130000"/>
               </a:lnSpc>
               <a:spcAft>
-                <a:spcPts val="800"/>
+                <a:spcPts val="1100"/>
               </a:spcAft>
               <a:buSzPct val="100000"/>
-              <a:buChar char="•"/>
+              <a:buChar char="–"/>
             </a:pPr>
             <a:r>
               <a:rPr lang="en-US" sz="1800" dirty="0">
                 <a:solidFill>
-                  <a:srgbClr val="374151"/>
-                </a:solidFill>
+                  <a:srgbClr val="23282E"/>
+                </a:solidFill>
+                <a:latin typeface="Corbel" pitchFamily="34" charset="0"/>
+                <a:ea typeface="Corbel" pitchFamily="34" charset="-122"/>
+                <a:cs typeface="Corbel" pitchFamily="34" charset="-120"/>
               </a:rPr>
               <a:t>Distinguish anonymity from confidentiality and implement both</a:t>
             </a:r>
@@ -5730,19 +6221,22 @@
           <a:p>
             <a:pPr marL="342900" indent="-342900">
               <a:lnSpc>
-                <a:spcPct val="125000"/>
+                <a:spcPct val="130000"/>
               </a:lnSpc>
               <a:spcAft>
-                <a:spcPts val="800"/>
+                <a:spcPts val="1100"/>
               </a:spcAft>
               <a:buSzPct val="100000"/>
-              <a:buChar char="•"/>
+              <a:buChar char="–"/>
             </a:pPr>
             <a:r>
               <a:rPr lang="en-US" sz="1800" dirty="0">
                 <a:solidFill>
-                  <a:srgbClr val="374151"/>
-                </a:solidFill>
+                  <a:srgbClr val="23282E"/>
+                </a:solidFill>
+                <a:latin typeface="Corbel" pitchFamily="34" charset="0"/>
+                <a:ea typeface="Corbel" pitchFamily="34" charset="-122"/>
+                <a:cs typeface="Corbel" pitchFamily="34" charset="-120"/>
               </a:rPr>
               <a:t>Identify vulnerable groups and the additional safeguards they require</a:t>
             </a:r>
@@ -5751,19 +6245,22 @@
           <a:p>
             <a:pPr marL="342900" indent="-342900">
               <a:lnSpc>
-                <a:spcPct val="125000"/>
+                <a:spcPct val="130000"/>
               </a:lnSpc>
               <a:spcAft>
-                <a:spcPts val="800"/>
+                <a:spcPts val="1100"/>
               </a:spcAft>
               <a:buSzPct val="100000"/>
-              <a:buChar char="•"/>
+              <a:buChar char="–"/>
             </a:pPr>
             <a:r>
               <a:rPr lang="en-US" sz="1800" dirty="0">
                 <a:solidFill>
-                  <a:srgbClr val="374151"/>
-                </a:solidFill>
+                  <a:srgbClr val="23282E"/>
+                </a:solidFill>
+                <a:latin typeface="Corbel" pitchFamily="34" charset="0"/>
+                <a:ea typeface="Corbel" pitchFamily="34" charset="-122"/>
+                <a:cs typeface="Corbel" pitchFamily="34" charset="-120"/>
               </a:rPr>
               <a:t>Apply authorship criteria and recognise research misconduct</a:t>
             </a:r>
@@ -5772,19 +6269,22 @@
           <a:p>
             <a:pPr marL="342900" indent="-342900">
               <a:lnSpc>
-                <a:spcPct val="125000"/>
+                <a:spcPct val="130000"/>
               </a:lnSpc>
               <a:spcAft>
-                <a:spcPts val="800"/>
+                <a:spcPts val="1100"/>
               </a:spcAft>
               <a:buSzPct val="100000"/>
-              <a:buChar char="•"/>
+              <a:buChar char="–"/>
             </a:pPr>
             <a:r>
               <a:rPr lang="en-US" sz="1800" dirty="0">
                 <a:solidFill>
-                  <a:srgbClr val="374151"/>
-                </a:solidFill>
+                  <a:srgbClr val="23282E"/>
+                </a:solidFill>
+                <a:latin typeface="Corbel" pitchFamily="34" charset="0"/>
+                <a:ea typeface="Corbel" pitchFamily="34" charset="-122"/>
+                <a:cs typeface="Corbel" pitchFamily="34" charset="-120"/>
               </a:rPr>
               <a:t>State a defensible position on the use of AI tools in research</a:t>
             </a:r>
@@ -5804,8 +6304,8 @@
         </p:nvSpPr>
         <p:spPr>
           <a:xfrm>
-            <a:off x="8503920" y="4709160"/>
-            <a:ext cx="800000" cy="300000"/>
+            <a:off x="566928" y="4700016"/>
+            <a:ext cx="914400" cy="274320"/>
           </a:xfrm>
           <a:prstGeom prst="rect">
             <a:avLst/>
@@ -5820,10 +6320,13 @@
           <a:bodyPr/>
           <a:lstStyle>
             <a:lvl1pPr>
-              <a:defRPr sz="1000">
-                <a:solidFill>
-                  <a:srgbClr val="6B7280"/>
-                </a:solidFill>
+              <a:defRPr sz="900">
+                <a:solidFill>
+                  <a:srgbClr val="5F6B76"/>
+                </a:solidFill>
+                <a:latin typeface="Corbel"/>
+                <a:ea typeface="Corbel"/>
+                <a:cs typeface="Corbel"/>
               </a:defRPr>
             </a:lvl1pPr>
           </a:lstStyle>
@@ -5870,8 +6373,8 @@
         </p:nvSpPr>
         <p:spPr>
           <a:xfrm>
-            <a:off x="502920" y="292608"/>
-            <a:ext cx="8046720" cy="228600"/>
+            <a:off x="685800" y="1024128"/>
+            <a:ext cx="6766560" cy="292608"/>
           </a:xfrm>
           <a:prstGeom prst="rect">
             <a:avLst/>
@@ -5887,14 +6390,17 @@
               <a:buNone/>
             </a:pPr>
             <a:r>
-              <a:rPr lang="en-US" sz="1100" b="1" spc="150" kern="0" dirty="0">
-                <a:solidFill>
-                  <a:srgbClr val="0066CC"/>
-                </a:solidFill>
-              </a:rPr>
-              <a:t>UNIT 9  ·  OVER TO YOU</a:t>
-            </a:r>
-            <a:endParaRPr lang="en-US" sz="1100" dirty="0"/>
+              <a:rPr lang="en-US" sz="1150" spc="240" kern="0" dirty="0">
+                <a:solidFill>
+                  <a:srgbClr val="C8A67B"/>
+                </a:solidFill>
+                <a:latin typeface="Corbel" pitchFamily="34" charset="0"/>
+                <a:ea typeface="Corbel" pitchFamily="34" charset="-122"/>
+                <a:cs typeface="Corbel" pitchFamily="34" charset="-120"/>
+              </a:rPr>
+              <a:t>Over to you</a:t>
+            </a:r>
+            <a:endParaRPr lang="en-US" sz="1150" dirty="0"/>
           </a:p>
         </p:txBody>
       </p:sp>
@@ -5906,8 +6412,8 @@
         </p:nvSpPr>
         <p:spPr>
           <a:xfrm>
-            <a:off x="502920" y="548640"/>
-            <a:ext cx="8046720" cy="640080"/>
+            <a:off x="685800" y="1700784"/>
+            <a:ext cx="6858000" cy="640080"/>
           </a:xfrm>
           <a:prstGeom prst="rect">
             <a:avLst/>
@@ -5923,14 +6429,17 @@
               <a:buNone/>
             </a:pPr>
             <a:r>
-              <a:rPr lang="en-US" sz="2400" b="1" dirty="0">
-                <a:solidFill>
-                  <a:srgbClr val="111827"/>
-                </a:solidFill>
+              <a:rPr lang="en-US" sz="3000" dirty="0">
+                <a:solidFill>
+                  <a:srgbClr val="FFFFFF"/>
+                </a:solidFill>
+                <a:latin typeface="Constantia" pitchFamily="34" charset="0"/>
+                <a:ea typeface="Constantia" pitchFamily="34" charset="-122"/>
+                <a:cs typeface="Constantia" pitchFamily="34" charset="-120"/>
               </a:rPr>
               <a:t>Activity</a:t>
             </a:r>
-            <a:endParaRPr lang="en-US" sz="2400" dirty="0"/>
+            <a:endParaRPr lang="en-US" sz="3000" dirty="0"/>
           </a:p>
         </p:txBody>
       </p:sp>
@@ -5942,8 +6451,8 @@
         </p:nvSpPr>
         <p:spPr>
           <a:xfrm>
-            <a:off x="685800" y="1325880"/>
-            <a:ext cx="7772400" cy="3200400"/>
+            <a:off x="685800" y="2487168"/>
+            <a:ext cx="6949440" cy="1737360"/>
           </a:xfrm>
           <a:prstGeom prst="rect">
             <a:avLst/>
@@ -5955,70 +6464,24 @@
           <a:bodyPr wrap="square" rtlCol="0" anchor="t"/>
           <a:lstStyle/>
           <a:p>
-            <a:pPr marL="342900" indent="-342900">
+            <a:pPr indent="0" marL="0">
               <a:lnSpc>
-                <a:spcPct val="125000"/>
+                <a:spcPct val="134000"/>
               </a:lnSpc>
-              <a:spcAft>
-                <a:spcPts val="800"/>
-              </a:spcAft>
-              <a:buSzPct val="100000"/>
-              <a:buChar char="•"/>
-            </a:pPr>
-            <a:r>
-              <a:rPr lang="en-US" sz="1300" dirty="0">
-                <a:solidFill>
-                  <a:srgbClr val="374151"/>
-                </a:solidFill>
+              <a:buNone/>
+            </a:pPr>
+            <a:r>
+              <a:rPr lang="en-US" sz="1450" dirty="0">
+                <a:solidFill>
+                  <a:srgbClr val="C4CCD4"/>
+                </a:solidFill>
+                <a:latin typeface="Corbel" pitchFamily="34" charset="0"/>
+                <a:ea typeface="Corbel" pitchFamily="34" charset="-122"/>
+                <a:cs typeface="Corbel" pitchFamily="34" charset="-120"/>
               </a:rPr>
               <a:t>You plan to interview nurses about errors they have witnessed. Draft the confidentiality paragraph of your information sheet, including its limits. Then list every way a reader might identify a participant from a quotation, and state how you would prevent each.</a:t>
             </a:r>
-            <a:endParaRPr lang="en-US" sz="1300" dirty="0"/>
-          </a:p>
-        </p:txBody>
-      </p:sp>
-      <p:sp>
-        <p:nvSpPr>
-          <p:cNvPr id="25" name="Slide Number Placeholder 0"/>
-          <p:cNvSpPr>
-            <a:spLocks noGrp="1"/>
-          </p:cNvSpPr>
-          <p:nvPr>
-            <p:ph type="sldNum" sz="quarter" idx="4294967295"/>
-          </p:nvPr>
-        </p:nvSpPr>
-        <p:spPr>
-          <a:xfrm>
-            <a:off x="8503920" y="4709160"/>
-            <a:ext cx="800000" cy="300000"/>
-          </a:xfrm>
-          <a:prstGeom prst="rect">
-            <a:avLst/>
-          </a:prstGeom>
-          <a:extLst>
-            <a:ext uri="{C572A759-6A51-4108-AA02-DFA0A04FC94B}">
-              <ma14:wrappingTextBoxFlag xmlns:ma14="http://schemas.microsoft.com/office/mac/drawingml/2011/main" val="0"/>
-            </a:ext>
-          </a:extLst>
-        </p:spPr>
-        <p:txBody>
-          <a:bodyPr/>
-          <a:lstStyle>
-            <a:lvl1pPr>
-              <a:defRPr sz="1000">
-                <a:solidFill>
-                  <a:srgbClr val="6B7280"/>
-                </a:solidFill>
-              </a:defRPr>
-            </a:lvl1pPr>
-          </a:lstStyle>
-          <a:p>
-            <a:pPr algn="l"/>
-            <a:fld id="{F7021451-1387-4CA6-816F-3879F97B5CBC}" type="slidenum">
-              <a:rPr b="0" lang="en-US"/>
-              <a:t>20</a:t>
-            </a:fld>
-            <a:endParaRPr lang="en-US"/>
+            <a:endParaRPr lang="en-US" sz="1450" dirty="0"/>
           </a:p>
         </p:txBody>
       </p:sp>
@@ -6055,8 +6518,8 @@
         </p:nvSpPr>
         <p:spPr>
           <a:xfrm>
-            <a:off x="502920" y="292608"/>
-            <a:ext cx="8046720" cy="228600"/>
+            <a:off x="566928" y="384048"/>
+            <a:ext cx="7772400" cy="237744"/>
           </a:xfrm>
           <a:prstGeom prst="rect">
             <a:avLst/>
@@ -6072,14 +6535,17 @@
               <a:buNone/>
             </a:pPr>
             <a:r>
-              <a:rPr lang="en-US" sz="1100" b="1" spc="150" kern="0" dirty="0">
-                <a:solidFill>
-                  <a:srgbClr val="0066CC"/>
-                </a:solidFill>
+              <a:rPr lang="en-US" sz="1000" spc="200" kern="0" dirty="0">
+                <a:solidFill>
+                  <a:srgbClr val="9A6A3C"/>
+                </a:solidFill>
+                <a:latin typeface="Corbel" pitchFamily="34" charset="0"/>
+                <a:ea typeface="Corbel" pitchFamily="34" charset="-122"/>
+                <a:cs typeface="Corbel" pitchFamily="34" charset="-120"/>
               </a:rPr>
               <a:t>UNIT 9</a:t>
             </a:r>
-            <a:endParaRPr lang="en-US" sz="1100" dirty="0"/>
+            <a:endParaRPr lang="en-US" sz="1000" dirty="0"/>
           </a:p>
         </p:txBody>
       </p:sp>
@@ -6091,8 +6557,8 @@
         </p:nvSpPr>
         <p:spPr>
           <a:xfrm>
-            <a:off x="502920" y="548640"/>
-            <a:ext cx="8046720" cy="640080"/>
+            <a:off x="566928" y="658368"/>
+            <a:ext cx="7772400" cy="658368"/>
           </a:xfrm>
           <a:prstGeom prst="rect">
             <a:avLst/>
@@ -6105,30 +6571,56 @@
           <a:lstStyle/>
           <a:p>
             <a:pPr indent="0" marL="0">
+              <a:lnSpc>
+                <a:spcPct val="100000"/>
+              </a:lnSpc>
               <a:buNone/>
             </a:pPr>
             <a:r>
-              <a:rPr lang="en-US" sz="2400" b="1" dirty="0">
-                <a:solidFill>
-                  <a:srgbClr val="111827"/>
-                </a:solidFill>
+              <a:rPr lang="en-US" sz="2500" dirty="0">
+                <a:solidFill>
+                  <a:srgbClr val="1C3140"/>
+                </a:solidFill>
+                <a:latin typeface="Constantia" pitchFamily="34" charset="0"/>
+                <a:ea typeface="Constantia" pitchFamily="34" charset="-122"/>
+                <a:cs typeface="Constantia" pitchFamily="34" charset="-120"/>
               </a:rPr>
               <a:t>Principles and their origins (1/2)</a:t>
             </a:r>
-            <a:endParaRPr lang="en-US" sz="2400" dirty="0"/>
-          </a:p>
-        </p:txBody>
-      </p:sp>
-      <p:sp>
-        <p:nvSpPr>
-          <p:cNvPr id="4" name="Text 2"/>
+            <a:endParaRPr lang="en-US" sz="2500" dirty="0"/>
+          </a:p>
+        </p:txBody>
+      </p:sp>
+      <p:sp>
+        <p:nvSpPr>
+          <p:cNvPr id="4" name="Shape 2"/>
           <p:cNvSpPr/>
           <p:nvPr/>
         </p:nvSpPr>
         <p:spPr>
           <a:xfrm>
-            <a:off x="685800" y="1325880"/>
-            <a:ext cx="7772400" cy="3200400"/>
+            <a:off x="566928" y="1335024"/>
+            <a:ext cx="566928" cy="20117"/>
+          </a:xfrm>
+          <a:prstGeom prst="rect">
+            <a:avLst/>
+          </a:prstGeom>
+          <a:solidFill>
+            <a:srgbClr val="9A6A3C"/>
+          </a:solidFill>
+          <a:ln/>
+        </p:spPr>
+      </p:sp>
+      <p:sp>
+        <p:nvSpPr>
+          <p:cNvPr id="5" name="Text 3"/>
+          <p:cNvSpPr/>
+          <p:nvPr/>
+        </p:nvSpPr>
+        <p:spPr>
+          <a:xfrm>
+            <a:off x="713232" y="1664208"/>
+            <a:ext cx="7498080" cy="2788920"/>
           </a:xfrm>
           <a:prstGeom prst="rect">
             <a:avLst/>
@@ -6142,19 +6634,22 @@
           <a:p>
             <a:pPr marL="342900" indent="-342900">
               <a:lnSpc>
-                <a:spcPct val="125000"/>
+                <a:spcPct val="130000"/>
               </a:lnSpc>
               <a:spcAft>
-                <a:spcPts val="800"/>
+                <a:spcPts val="1100"/>
               </a:spcAft>
               <a:buSzPct val="100000"/>
-              <a:buChar char="•"/>
+              <a:buChar char="–"/>
             </a:pPr>
             <a:r>
               <a:rPr lang="en-US" sz="1500" dirty="0">
                 <a:solidFill>
-                  <a:srgbClr val="374151"/>
-                </a:solidFill>
+                  <a:srgbClr val="23282E"/>
+                </a:solidFill>
+                <a:latin typeface="Corbel" pitchFamily="34" charset="0"/>
+                <a:ea typeface="Corbel" pitchFamily="34" charset="-122"/>
+                <a:cs typeface="Corbel" pitchFamily="34" charset="-120"/>
               </a:rPr>
               <a:t>The Nuremberg Code followed the Nazi medical experiments; the Declaration of Helsinki and the Belmont Report followed later abuses, including Tuskegee</a:t>
             </a:r>
@@ -6163,19 +6658,22 @@
           <a:p>
             <a:pPr marL="342900" indent="-342900">
               <a:lnSpc>
-                <a:spcPct val="125000"/>
+                <a:spcPct val="130000"/>
               </a:lnSpc>
               <a:spcAft>
-                <a:spcPts val="800"/>
+                <a:spcPts val="1100"/>
               </a:spcAft>
               <a:buSzPct val="100000"/>
-              <a:buChar char="•"/>
+              <a:buChar char="–"/>
             </a:pPr>
             <a:r>
               <a:rPr lang="en-US" sz="1500" dirty="0">
                 <a:solidFill>
-                  <a:srgbClr val="374151"/>
-                </a:solidFill>
+                  <a:srgbClr val="23282E"/>
+                </a:solidFill>
+                <a:latin typeface="Corbel" pitchFamily="34" charset="0"/>
+                <a:ea typeface="Corbel" pitchFamily="34" charset="-122"/>
+                <a:cs typeface="Corbel" pitchFamily="34" charset="-120"/>
               </a:rPr>
               <a:t>Autonomy — people decide for themselves whether to take part, having understood what is involved</a:t>
             </a:r>
@@ -6184,19 +6682,22 @@
           <a:p>
             <a:pPr marL="342900" indent="-342900">
               <a:lnSpc>
-                <a:spcPct val="125000"/>
+                <a:spcPct val="130000"/>
               </a:lnSpc>
               <a:spcAft>
-                <a:spcPts val="800"/>
+                <a:spcPts val="1100"/>
               </a:spcAft>
               <a:buSzPct val="100000"/>
-              <a:buChar char="•"/>
+              <a:buChar char="–"/>
             </a:pPr>
             <a:r>
               <a:rPr lang="en-US" sz="1500" dirty="0">
                 <a:solidFill>
-                  <a:srgbClr val="374151"/>
-                </a:solidFill>
+                  <a:srgbClr val="23282E"/>
+                </a:solidFill>
+                <a:latin typeface="Corbel" pitchFamily="34" charset="0"/>
+                <a:ea typeface="Corbel" pitchFamily="34" charset="-122"/>
+                <a:cs typeface="Corbel" pitchFamily="34" charset="-120"/>
               </a:rPr>
               <a:t>Beneficence — maximise benefit; Non-maleficence — minimise harm; the two are weighed together</a:t>
             </a:r>
@@ -6216,8 +6717,8 @@
         </p:nvSpPr>
         <p:spPr>
           <a:xfrm>
-            <a:off x="8503920" y="4709160"/>
-            <a:ext cx="800000" cy="300000"/>
+            <a:off x="566928" y="4700016"/>
+            <a:ext cx="914400" cy="274320"/>
           </a:xfrm>
           <a:prstGeom prst="rect">
             <a:avLst/>
@@ -6232,10 +6733,13 @@
           <a:bodyPr/>
           <a:lstStyle>
             <a:lvl1pPr>
-              <a:defRPr sz="1000">
-                <a:solidFill>
-                  <a:srgbClr val="6B7280"/>
-                </a:solidFill>
+              <a:defRPr sz="900">
+                <a:solidFill>
+                  <a:srgbClr val="5F6B76"/>
+                </a:solidFill>
+                <a:latin typeface="Corbel"/>
+                <a:ea typeface="Corbel"/>
+                <a:cs typeface="Corbel"/>
               </a:defRPr>
             </a:lvl1pPr>
           </a:lstStyle>
@@ -6282,8 +6786,8 @@
         </p:nvSpPr>
         <p:spPr>
           <a:xfrm>
-            <a:off x="502920" y="292608"/>
-            <a:ext cx="8046720" cy="228600"/>
+            <a:off x="566928" y="384048"/>
+            <a:ext cx="7772400" cy="237744"/>
           </a:xfrm>
           <a:prstGeom prst="rect">
             <a:avLst/>
@@ -6299,14 +6803,17 @@
               <a:buNone/>
             </a:pPr>
             <a:r>
-              <a:rPr lang="en-US" sz="1100" b="1" spc="150" kern="0" dirty="0">
-                <a:solidFill>
-                  <a:srgbClr val="0066CC"/>
-                </a:solidFill>
+              <a:rPr lang="en-US" sz="1000" spc="200" kern="0" dirty="0">
+                <a:solidFill>
+                  <a:srgbClr val="9A6A3C"/>
+                </a:solidFill>
+                <a:latin typeface="Corbel" pitchFamily="34" charset="0"/>
+                <a:ea typeface="Corbel" pitchFamily="34" charset="-122"/>
+                <a:cs typeface="Corbel" pitchFamily="34" charset="-120"/>
               </a:rPr>
               <a:t>UNIT 9</a:t>
             </a:r>
-            <a:endParaRPr lang="en-US" sz="1100" dirty="0"/>
+            <a:endParaRPr lang="en-US" sz="1000" dirty="0"/>
           </a:p>
         </p:txBody>
       </p:sp>
@@ -6318,8 +6825,8 @@
         </p:nvSpPr>
         <p:spPr>
           <a:xfrm>
-            <a:off x="502920" y="548640"/>
-            <a:ext cx="8046720" cy="640080"/>
+            <a:off x="566928" y="658368"/>
+            <a:ext cx="7772400" cy="658368"/>
           </a:xfrm>
           <a:prstGeom prst="rect">
             <a:avLst/>
@@ -6332,30 +6839,56 @@
           <a:lstStyle/>
           <a:p>
             <a:pPr indent="0" marL="0">
+              <a:lnSpc>
+                <a:spcPct val="100000"/>
+              </a:lnSpc>
               <a:buNone/>
             </a:pPr>
             <a:r>
-              <a:rPr lang="en-US" sz="2400" b="1" dirty="0">
-                <a:solidFill>
-                  <a:srgbClr val="111827"/>
-                </a:solidFill>
+              <a:rPr lang="en-US" sz="2500" dirty="0">
+                <a:solidFill>
+                  <a:srgbClr val="1C3140"/>
+                </a:solidFill>
+                <a:latin typeface="Constantia" pitchFamily="34" charset="0"/>
+                <a:ea typeface="Constantia" pitchFamily="34" charset="-122"/>
+                <a:cs typeface="Constantia" pitchFamily="34" charset="-120"/>
               </a:rPr>
               <a:t>Principles and their origins (2/2)</a:t>
             </a:r>
-            <a:endParaRPr lang="en-US" sz="2400" dirty="0"/>
-          </a:p>
-        </p:txBody>
-      </p:sp>
-      <p:sp>
-        <p:nvSpPr>
-          <p:cNvPr id="4" name="Text 2"/>
+            <a:endParaRPr lang="en-US" sz="2500" dirty="0"/>
+          </a:p>
+        </p:txBody>
+      </p:sp>
+      <p:sp>
+        <p:nvSpPr>
+          <p:cNvPr id="4" name="Shape 2"/>
           <p:cNvSpPr/>
           <p:nvPr/>
         </p:nvSpPr>
         <p:spPr>
           <a:xfrm>
-            <a:off x="685800" y="1325880"/>
-            <a:ext cx="7772400" cy="3200400"/>
+            <a:off x="566928" y="1335024"/>
+            <a:ext cx="566928" cy="20117"/>
+          </a:xfrm>
+          <a:prstGeom prst="rect">
+            <a:avLst/>
+          </a:prstGeom>
+          <a:solidFill>
+            <a:srgbClr val="9A6A3C"/>
+          </a:solidFill>
+          <a:ln/>
+        </p:spPr>
+      </p:sp>
+      <p:sp>
+        <p:nvSpPr>
+          <p:cNvPr id="5" name="Text 3"/>
+          <p:cNvSpPr/>
+          <p:nvPr/>
+        </p:nvSpPr>
+        <p:spPr>
+          <a:xfrm>
+            <a:off x="713232" y="1664208"/>
+            <a:ext cx="7498080" cy="2788920"/>
           </a:xfrm>
           <a:prstGeom prst="rect">
             <a:avLst/>
@@ -6369,19 +6902,22 @@
           <a:p>
             <a:pPr marL="342900" indent="-342900">
               <a:lnSpc>
-                <a:spcPct val="125000"/>
+                <a:spcPct val="130000"/>
               </a:lnSpc>
               <a:spcAft>
-                <a:spcPts val="800"/>
+                <a:spcPts val="1100"/>
               </a:spcAft>
               <a:buSzPct val="100000"/>
-              <a:buChar char="•"/>
+              <a:buChar char="–"/>
             </a:pPr>
             <a:r>
               <a:rPr lang="en-US" sz="1500" dirty="0">
                 <a:solidFill>
-                  <a:srgbClr val="374151"/>
-                </a:solidFill>
+                  <a:srgbClr val="23282E"/>
+                </a:solidFill>
+                <a:latin typeface="Corbel" pitchFamily="34" charset="0"/>
+                <a:ea typeface="Corbel" pitchFamily="34" charset="-122"/>
+                <a:cs typeface="Corbel" pitchFamily="34" charset="-120"/>
               </a:rPr>
               <a:t>Justice — burdens and benefits are distributed fairly, and no group is used as a convenient subject pool for research that will benefit others</a:t>
             </a:r>
@@ -6390,19 +6926,22 @@
           <a:p>
             <a:pPr marL="342900" indent="-342900">
               <a:lnSpc>
-                <a:spcPct val="125000"/>
+                <a:spcPct val="130000"/>
               </a:lnSpc>
               <a:spcAft>
-                <a:spcPts val="800"/>
+                <a:spcPts val="1100"/>
               </a:spcAft>
               <a:buSzPct val="100000"/>
-              <a:buChar char="•"/>
+              <a:buChar char="–"/>
             </a:pPr>
             <a:r>
               <a:rPr lang="en-US" sz="1500" dirty="0">
                 <a:solidFill>
-                  <a:srgbClr val="374151"/>
-                </a:solidFill>
+                  <a:srgbClr val="23282E"/>
+                </a:solidFill>
+                <a:latin typeface="Corbel" pitchFamily="34" charset="0"/>
+                <a:ea typeface="Corbel" pitchFamily="34" charset="-122"/>
+                <a:cs typeface="Corbel" pitchFamily="34" charset="-120"/>
               </a:rPr>
               <a:t>Justice has particular weight in African research settings, where communities have historically borne research burden without sharing in benefit</a:t>
             </a:r>
@@ -6411,19 +6950,22 @@
           <a:p>
             <a:pPr marL="342900" indent="-342900">
               <a:lnSpc>
-                <a:spcPct val="125000"/>
+                <a:spcPct val="130000"/>
               </a:lnSpc>
               <a:spcAft>
-                <a:spcPts val="800"/>
+                <a:spcPts val="1100"/>
               </a:spcAft>
               <a:buSzPct val="100000"/>
-              <a:buChar char="•"/>
+              <a:buChar char="–"/>
             </a:pPr>
             <a:r>
               <a:rPr lang="en-US" sz="1500" dirty="0">
                 <a:solidFill>
-                  <a:srgbClr val="374151"/>
-                </a:solidFill>
+                  <a:srgbClr val="23282E"/>
+                </a:solidFill>
+                <a:latin typeface="Corbel" pitchFamily="34" charset="0"/>
+                <a:ea typeface="Corbel" pitchFamily="34" charset="-122"/>
+                <a:cs typeface="Corbel" pitchFamily="34" charset="-120"/>
               </a:rPr>
               <a:t>Ethical conduct is not a form to be completed; it is a continuing obligation through the study</a:t>
             </a:r>
@@ -6443,8 +6985,8 @@
         </p:nvSpPr>
         <p:spPr>
           <a:xfrm>
-            <a:off x="8503920" y="4709160"/>
-            <a:ext cx="800000" cy="300000"/>
+            <a:off x="566928" y="4700016"/>
+            <a:ext cx="914400" cy="274320"/>
           </a:xfrm>
           <a:prstGeom prst="rect">
             <a:avLst/>
@@ -6459,10 +7001,13 @@
           <a:bodyPr/>
           <a:lstStyle>
             <a:lvl1pPr>
-              <a:defRPr sz="1000">
-                <a:solidFill>
-                  <a:srgbClr val="6B7280"/>
-                </a:solidFill>
+              <a:defRPr sz="900">
+                <a:solidFill>
+                  <a:srgbClr val="5F6B76"/>
+                </a:solidFill>
+                <a:latin typeface="Corbel"/>
+                <a:ea typeface="Corbel"/>
+                <a:cs typeface="Corbel"/>
               </a:defRPr>
             </a:lvl1pPr>
           </a:lstStyle>
@@ -6509,8 +7054,8 @@
         </p:nvSpPr>
         <p:spPr>
           <a:xfrm>
-            <a:off x="502920" y="292608"/>
-            <a:ext cx="8046720" cy="228600"/>
+            <a:off x="566928" y="384048"/>
+            <a:ext cx="7772400" cy="237744"/>
           </a:xfrm>
           <a:prstGeom prst="rect">
             <a:avLst/>
@@ -6526,14 +7071,17 @@
               <a:buNone/>
             </a:pPr>
             <a:r>
-              <a:rPr lang="en-US" sz="1100" b="1" spc="150" kern="0" dirty="0">
-                <a:solidFill>
-                  <a:srgbClr val="0066CC"/>
-                </a:solidFill>
+              <a:rPr lang="en-US" sz="1000" spc="200" kern="0" dirty="0">
+                <a:solidFill>
+                  <a:srgbClr val="9A6A3C"/>
+                </a:solidFill>
+                <a:latin typeface="Corbel" pitchFamily="34" charset="0"/>
+                <a:ea typeface="Corbel" pitchFamily="34" charset="-122"/>
+                <a:cs typeface="Corbel" pitchFamily="34" charset="-120"/>
               </a:rPr>
               <a:t>UNIT 9</a:t>
             </a:r>
-            <a:endParaRPr lang="en-US" sz="1100" dirty="0"/>
+            <a:endParaRPr lang="en-US" sz="1000" dirty="0"/>
           </a:p>
         </p:txBody>
       </p:sp>
@@ -6545,8 +7093,8 @@
         </p:nvSpPr>
         <p:spPr>
           <a:xfrm>
-            <a:off x="502920" y="548640"/>
-            <a:ext cx="8046720" cy="640080"/>
+            <a:off x="566928" y="658368"/>
+            <a:ext cx="7772400" cy="658368"/>
           </a:xfrm>
           <a:prstGeom prst="rect">
             <a:avLst/>
@@ -6559,30 +7107,56 @@
           <a:lstStyle/>
           <a:p>
             <a:pPr indent="0" marL="0">
+              <a:lnSpc>
+                <a:spcPct val="100000"/>
+              </a:lnSpc>
               <a:buNone/>
             </a:pPr>
             <a:r>
-              <a:rPr lang="en-US" sz="2400" b="1" dirty="0">
-                <a:solidFill>
-                  <a:srgbClr val="111827"/>
-                </a:solidFill>
+              <a:rPr lang="en-US" sz="2500" dirty="0">
+                <a:solidFill>
+                  <a:srgbClr val="1C3140"/>
+                </a:solidFill>
+                <a:latin typeface="Constantia" pitchFamily="34" charset="0"/>
+                <a:ea typeface="Constantia" pitchFamily="34" charset="-122"/>
+                <a:cs typeface="Constantia" pitchFamily="34" charset="-120"/>
               </a:rPr>
               <a:t>Informed consent (1/3)</a:t>
             </a:r>
-            <a:endParaRPr lang="en-US" sz="2400" dirty="0"/>
-          </a:p>
-        </p:txBody>
-      </p:sp>
-      <p:sp>
-        <p:nvSpPr>
-          <p:cNvPr id="4" name="Text 2"/>
+            <a:endParaRPr lang="en-US" sz="2500" dirty="0"/>
+          </a:p>
+        </p:txBody>
+      </p:sp>
+      <p:sp>
+        <p:nvSpPr>
+          <p:cNvPr id="4" name="Shape 2"/>
           <p:cNvSpPr/>
           <p:nvPr/>
         </p:nvSpPr>
         <p:spPr>
           <a:xfrm>
-            <a:off x="685800" y="1325880"/>
-            <a:ext cx="7772400" cy="3200400"/>
+            <a:off x="566928" y="1335024"/>
+            <a:ext cx="566928" cy="20117"/>
+          </a:xfrm>
+          <a:prstGeom prst="rect">
+            <a:avLst/>
+          </a:prstGeom>
+          <a:solidFill>
+            <a:srgbClr val="9A6A3C"/>
+          </a:solidFill>
+          <a:ln/>
+        </p:spPr>
+      </p:sp>
+      <p:sp>
+        <p:nvSpPr>
+          <p:cNvPr id="5" name="Text 3"/>
+          <p:cNvSpPr/>
+          <p:nvPr/>
+        </p:nvSpPr>
+        <p:spPr>
+          <a:xfrm>
+            <a:off x="713232" y="1664208"/>
+            <a:ext cx="7498080" cy="2788920"/>
           </a:xfrm>
           <a:prstGeom prst="rect">
             <a:avLst/>
@@ -6596,19 +7170,22 @@
           <a:p>
             <a:pPr marL="342900" indent="-342900">
               <a:lnSpc>
-                <a:spcPct val="125000"/>
+                <a:spcPct val="130000"/>
               </a:lnSpc>
               <a:spcAft>
-                <a:spcPts val="800"/>
+                <a:spcPts val="1100"/>
               </a:spcAft>
               <a:buSzPct val="100000"/>
-              <a:buChar char="•"/>
+              <a:buChar char="–"/>
             </a:pPr>
             <a:r>
               <a:rPr lang="en-US" sz="1500" dirty="0">
                 <a:solidFill>
-                  <a:srgbClr val="374151"/>
-                </a:solidFill>
+                  <a:srgbClr val="23282E"/>
+                </a:solidFill>
+                <a:latin typeface="Corbel" pitchFamily="34" charset="0"/>
+                <a:ea typeface="Corbel" pitchFamily="34" charset="-122"/>
+                <a:cs typeface="Corbel" pitchFamily="34" charset="-120"/>
               </a:rPr>
               <a:t>Information — purpose, procedures, duration, risks, benefits, alternatives, confidentiality limits, and who to contact</a:t>
             </a:r>
@@ -6617,19 +7194,22 @@
           <a:p>
             <a:pPr marL="342900" indent="-342900">
               <a:lnSpc>
-                <a:spcPct val="125000"/>
+                <a:spcPct val="130000"/>
               </a:lnSpc>
               <a:spcAft>
-                <a:spcPts val="800"/>
+                <a:spcPts val="1100"/>
               </a:spcAft>
               <a:buSzPct val="100000"/>
-              <a:buChar char="•"/>
+              <a:buChar char="–"/>
             </a:pPr>
             <a:r>
               <a:rPr lang="en-US" sz="1500" dirty="0">
                 <a:solidFill>
-                  <a:srgbClr val="374151"/>
-                </a:solidFill>
+                  <a:srgbClr val="23282E"/>
+                </a:solidFill>
+                <a:latin typeface="Corbel" pitchFamily="34" charset="0"/>
+                <a:ea typeface="Corbel" pitchFamily="34" charset="-122"/>
+                <a:cs typeface="Corbel" pitchFamily="34" charset="-120"/>
               </a:rPr>
               <a:t>Comprehension — in the participant's language, at an appropriate reading level, with opportunity to ask questions</a:t>
             </a:r>
@@ -6638,19 +7218,22 @@
           <a:p>
             <a:pPr marL="342900" indent="-342900">
               <a:lnSpc>
-                <a:spcPct val="125000"/>
+                <a:spcPct val="130000"/>
               </a:lnSpc>
               <a:spcAft>
-                <a:spcPts val="800"/>
+                <a:spcPts val="1100"/>
               </a:spcAft>
               <a:buSzPct val="100000"/>
-              <a:buChar char="•"/>
+              <a:buChar char="–"/>
             </a:pPr>
             <a:r>
               <a:rPr lang="en-US" sz="1500" dirty="0">
                 <a:solidFill>
-                  <a:srgbClr val="374151"/>
-                </a:solidFill>
+                  <a:srgbClr val="23282E"/>
+                </a:solidFill>
+                <a:latin typeface="Corbel" pitchFamily="34" charset="0"/>
+                <a:ea typeface="Corbel" pitchFamily="34" charset="-122"/>
+                <a:cs typeface="Corbel" pitchFamily="34" charset="-120"/>
               </a:rPr>
               <a:t>Voluntariness — free from coercion or undue inducement; compensation should cover cost and time, not act as an incentive that overrides judgement</a:t>
             </a:r>
@@ -6670,8 +7253,8 @@
         </p:nvSpPr>
         <p:spPr>
           <a:xfrm>
-            <a:off x="8503920" y="4709160"/>
-            <a:ext cx="800000" cy="300000"/>
+            <a:off x="566928" y="4700016"/>
+            <a:ext cx="914400" cy="274320"/>
           </a:xfrm>
           <a:prstGeom prst="rect">
             <a:avLst/>
@@ -6686,10 +7269,13 @@
           <a:bodyPr/>
           <a:lstStyle>
             <a:lvl1pPr>
-              <a:defRPr sz="1000">
-                <a:solidFill>
-                  <a:srgbClr val="6B7280"/>
-                </a:solidFill>
+              <a:defRPr sz="900">
+                <a:solidFill>
+                  <a:srgbClr val="5F6B76"/>
+                </a:solidFill>
+                <a:latin typeface="Corbel"/>
+                <a:ea typeface="Corbel"/>
+                <a:cs typeface="Corbel"/>
               </a:defRPr>
             </a:lvl1pPr>
           </a:lstStyle>
@@ -6736,8 +7322,8 @@
         </p:nvSpPr>
         <p:spPr>
           <a:xfrm>
-            <a:off x="502920" y="292608"/>
-            <a:ext cx="8046720" cy="228600"/>
+            <a:off x="566928" y="384048"/>
+            <a:ext cx="7772400" cy="237744"/>
           </a:xfrm>
           <a:prstGeom prst="rect">
             <a:avLst/>
@@ -6753,14 +7339,17 @@
               <a:buNone/>
             </a:pPr>
             <a:r>
-              <a:rPr lang="en-US" sz="1100" b="1" spc="150" kern="0" dirty="0">
-                <a:solidFill>
-                  <a:srgbClr val="0066CC"/>
-                </a:solidFill>
+              <a:rPr lang="en-US" sz="1000" spc="200" kern="0" dirty="0">
+                <a:solidFill>
+                  <a:srgbClr val="9A6A3C"/>
+                </a:solidFill>
+                <a:latin typeface="Corbel" pitchFamily="34" charset="0"/>
+                <a:ea typeface="Corbel" pitchFamily="34" charset="-122"/>
+                <a:cs typeface="Corbel" pitchFamily="34" charset="-120"/>
               </a:rPr>
               <a:t>UNIT 9</a:t>
             </a:r>
-            <a:endParaRPr lang="en-US" sz="1100" dirty="0"/>
+            <a:endParaRPr lang="en-US" sz="1000" dirty="0"/>
           </a:p>
         </p:txBody>
       </p:sp>
@@ -6772,8 +7361,8 @@
         </p:nvSpPr>
         <p:spPr>
           <a:xfrm>
-            <a:off x="502920" y="548640"/>
-            <a:ext cx="8046720" cy="640080"/>
+            <a:off x="566928" y="658368"/>
+            <a:ext cx="7772400" cy="658368"/>
           </a:xfrm>
           <a:prstGeom prst="rect">
             <a:avLst/>
@@ -6786,30 +7375,56 @@
           <a:lstStyle/>
           <a:p>
             <a:pPr indent="0" marL="0">
+              <a:lnSpc>
+                <a:spcPct val="100000"/>
+              </a:lnSpc>
               <a:buNone/>
             </a:pPr>
             <a:r>
-              <a:rPr lang="en-US" sz="2400" b="1" dirty="0">
-                <a:solidFill>
-                  <a:srgbClr val="111827"/>
-                </a:solidFill>
+              <a:rPr lang="en-US" sz="2500" dirty="0">
+                <a:solidFill>
+                  <a:srgbClr val="1C3140"/>
+                </a:solidFill>
+                <a:latin typeface="Constantia" pitchFamily="34" charset="0"/>
+                <a:ea typeface="Constantia" pitchFamily="34" charset="-122"/>
+                <a:cs typeface="Constantia" pitchFamily="34" charset="-120"/>
               </a:rPr>
               <a:t>Informed consent (2/3)</a:t>
             </a:r>
-            <a:endParaRPr lang="en-US" sz="2400" dirty="0"/>
-          </a:p>
-        </p:txBody>
-      </p:sp>
-      <p:sp>
-        <p:nvSpPr>
-          <p:cNvPr id="4" name="Text 2"/>
+            <a:endParaRPr lang="en-US" sz="2500" dirty="0"/>
+          </a:p>
+        </p:txBody>
+      </p:sp>
+      <p:sp>
+        <p:nvSpPr>
+          <p:cNvPr id="4" name="Shape 2"/>
           <p:cNvSpPr/>
           <p:nvPr/>
         </p:nvSpPr>
         <p:spPr>
           <a:xfrm>
-            <a:off x="685800" y="1325880"/>
-            <a:ext cx="7772400" cy="3200400"/>
+            <a:off x="566928" y="1335024"/>
+            <a:ext cx="566928" cy="20117"/>
+          </a:xfrm>
+          <a:prstGeom prst="rect">
+            <a:avLst/>
+          </a:prstGeom>
+          <a:solidFill>
+            <a:srgbClr val="9A6A3C"/>
+          </a:solidFill>
+          <a:ln/>
+        </p:spPr>
+      </p:sp>
+      <p:sp>
+        <p:nvSpPr>
+          <p:cNvPr id="5" name="Text 3"/>
+          <p:cNvSpPr/>
+          <p:nvPr/>
+        </p:nvSpPr>
+        <p:spPr>
+          <a:xfrm>
+            <a:off x="713232" y="1664208"/>
+            <a:ext cx="7498080" cy="2788920"/>
           </a:xfrm>
           <a:prstGeom prst="rect">
             <a:avLst/>
@@ -6823,86 +7438,98 @@
           <a:p>
             <a:pPr marL="342900" indent="-342900">
               <a:lnSpc>
-                <a:spcPct val="125000"/>
+                <a:spcPct val="130000"/>
               </a:lnSpc>
               <a:spcAft>
-                <a:spcPts val="800"/>
+                <a:spcPts val="1100"/>
               </a:spcAft>
               <a:buSzPct val="100000"/>
-              <a:buChar char="•"/>
-            </a:pPr>
-            <a:r>
-              <a:rPr lang="en-US" sz="1700" dirty="0">
-                <a:solidFill>
-                  <a:srgbClr val="374151"/>
-                </a:solidFill>
+              <a:buChar char="–"/>
+            </a:pPr>
+            <a:r>
+              <a:rPr lang="en-US" sz="1650" dirty="0">
+                <a:solidFill>
+                  <a:srgbClr val="23282E"/>
+                </a:solidFill>
+                <a:latin typeface="Corbel" pitchFamily="34" charset="0"/>
+                <a:ea typeface="Corbel" pitchFamily="34" charset="-122"/>
+                <a:cs typeface="Corbel" pitchFamily="34" charset="-120"/>
               </a:rPr>
               <a:t>Documentation — signature, thumbprint or witnessed verbal consent, as appropriate to context and literacy</a:t>
             </a:r>
-            <a:endParaRPr lang="en-US" sz="1700" dirty="0"/>
+            <a:endParaRPr lang="en-US" sz="1650" dirty="0"/>
           </a:p>
           <a:p>
             <a:pPr marL="342900" indent="-342900">
               <a:lnSpc>
-                <a:spcPct val="125000"/>
+                <a:spcPct val="130000"/>
               </a:lnSpc>
               <a:spcAft>
-                <a:spcPts val="800"/>
+                <a:spcPts val="1100"/>
               </a:spcAft>
               <a:buSzPct val="100000"/>
-              <a:buChar char="•"/>
-            </a:pPr>
-            <a:r>
-              <a:rPr lang="en-US" sz="1700" dirty="0">
-                <a:solidFill>
-                  <a:srgbClr val="374151"/>
-                </a:solidFill>
+              <a:buChar char="–"/>
+            </a:pPr>
+            <a:r>
+              <a:rPr lang="en-US" sz="1650" dirty="0">
+                <a:solidFill>
+                  <a:srgbClr val="23282E"/>
+                </a:solidFill>
+                <a:latin typeface="Corbel" pitchFamily="34" charset="0"/>
+                <a:ea typeface="Corbel" pitchFamily="34" charset="-122"/>
+                <a:cs typeface="Corbel" pitchFamily="34" charset="-120"/>
               </a:rPr>
               <a:t>The right to withdraw at any time, without giving a reason and without penalty, must be stated and honoured</a:t>
             </a:r>
-            <a:endParaRPr lang="en-US" sz="1700" dirty="0"/>
+            <a:endParaRPr lang="en-US" sz="1650" dirty="0"/>
           </a:p>
           <a:p>
             <a:pPr marL="342900" indent="-342900">
               <a:lnSpc>
-                <a:spcPct val="125000"/>
+                <a:spcPct val="130000"/>
               </a:lnSpc>
               <a:spcAft>
-                <a:spcPts val="800"/>
+                <a:spcPts val="1100"/>
               </a:spcAft>
               <a:buSzPct val="100000"/>
-              <a:buChar char="•"/>
-            </a:pPr>
-            <a:r>
-              <a:rPr lang="en-US" sz="1700" dirty="0">
-                <a:solidFill>
-                  <a:srgbClr val="374151"/>
-                </a:solidFill>
+              <a:buChar char="–"/>
+            </a:pPr>
+            <a:r>
+              <a:rPr lang="en-US" sz="1650" dirty="0">
+                <a:solidFill>
+                  <a:srgbClr val="23282E"/>
+                </a:solidFill>
+                <a:latin typeface="Corbel" pitchFamily="34" charset="0"/>
+                <a:ea typeface="Corbel" pitchFamily="34" charset="-122"/>
+                <a:cs typeface="Corbel" pitchFamily="34" charset="-120"/>
               </a:rPr>
               <a:t>Children give assent while a parent or guardian gives consent; the age of assent varies by jurisdiction</a:t>
             </a:r>
-            <a:endParaRPr lang="en-US" sz="1700" dirty="0"/>
+            <a:endParaRPr lang="en-US" sz="1650" dirty="0"/>
           </a:p>
           <a:p>
             <a:pPr marL="342900" indent="-342900">
               <a:lnSpc>
-                <a:spcPct val="125000"/>
+                <a:spcPct val="130000"/>
               </a:lnSpc>
               <a:spcAft>
-                <a:spcPts val="800"/>
+                <a:spcPts val="1100"/>
               </a:spcAft>
               <a:buSzPct val="100000"/>
-              <a:buChar char="•"/>
-            </a:pPr>
-            <a:r>
-              <a:rPr lang="en-US" sz="1700" dirty="0">
-                <a:solidFill>
-                  <a:srgbClr val="374151"/>
-                </a:solidFill>
+              <a:buChar char="–"/>
+            </a:pPr>
+            <a:r>
+              <a:rPr lang="en-US" sz="1650" dirty="0">
+                <a:solidFill>
+                  <a:srgbClr val="23282E"/>
+                </a:solidFill>
+                <a:latin typeface="Corbel" pitchFamily="34" charset="0"/>
+                <a:ea typeface="Corbel" pitchFamily="34" charset="-122"/>
+                <a:cs typeface="Corbel" pitchFamily="34" charset="-120"/>
               </a:rPr>
               <a:t>Consent is a process, not a signature: it should be revisited in longitudinal and ethnographic work</a:t>
             </a:r>
-            <a:endParaRPr lang="en-US" sz="1700" dirty="0"/>
+            <a:endParaRPr lang="en-US" sz="1650" dirty="0"/>
           </a:p>
         </p:txBody>
       </p:sp>
@@ -6918,8 +7545,8 @@
         </p:nvSpPr>
         <p:spPr>
           <a:xfrm>
-            <a:off x="8503920" y="4709160"/>
-            <a:ext cx="800000" cy="300000"/>
+            <a:off x="566928" y="4700016"/>
+            <a:ext cx="914400" cy="274320"/>
           </a:xfrm>
           <a:prstGeom prst="rect">
             <a:avLst/>
@@ -6934,10 +7561,13 @@
           <a:bodyPr/>
           <a:lstStyle>
             <a:lvl1pPr>
-              <a:defRPr sz="1000">
-                <a:solidFill>
-                  <a:srgbClr val="6B7280"/>
-                </a:solidFill>
+              <a:defRPr sz="900">
+                <a:solidFill>
+                  <a:srgbClr val="5F6B76"/>
+                </a:solidFill>
+                <a:latin typeface="Corbel"/>
+                <a:ea typeface="Corbel"/>
+                <a:cs typeface="Corbel"/>
               </a:defRPr>
             </a:lvl1pPr>
           </a:lstStyle>
@@ -6984,8 +7614,8 @@
         </p:nvSpPr>
         <p:spPr>
           <a:xfrm>
-            <a:off x="502920" y="292608"/>
-            <a:ext cx="8046720" cy="228600"/>
+            <a:off x="566928" y="384048"/>
+            <a:ext cx="7772400" cy="237744"/>
           </a:xfrm>
           <a:prstGeom prst="rect">
             <a:avLst/>
@@ -7001,14 +7631,17 @@
               <a:buNone/>
             </a:pPr>
             <a:r>
-              <a:rPr lang="en-US" sz="1100" b="1" spc="150" kern="0" dirty="0">
-                <a:solidFill>
-                  <a:srgbClr val="0066CC"/>
-                </a:solidFill>
+              <a:rPr lang="en-US" sz="1000" spc="200" kern="0" dirty="0">
+                <a:solidFill>
+                  <a:srgbClr val="9A6A3C"/>
+                </a:solidFill>
+                <a:latin typeface="Corbel" pitchFamily="34" charset="0"/>
+                <a:ea typeface="Corbel" pitchFamily="34" charset="-122"/>
+                <a:cs typeface="Corbel" pitchFamily="34" charset="-120"/>
               </a:rPr>
               <a:t>UNIT 9</a:t>
             </a:r>
-            <a:endParaRPr lang="en-US" sz="1100" dirty="0"/>
+            <a:endParaRPr lang="en-US" sz="1000" dirty="0"/>
           </a:p>
         </p:txBody>
       </p:sp>
@@ -7020,8 +7653,8 @@
         </p:nvSpPr>
         <p:spPr>
           <a:xfrm>
-            <a:off x="502920" y="548640"/>
-            <a:ext cx="8046720" cy="640080"/>
+            <a:off x="566928" y="658368"/>
+            <a:ext cx="7772400" cy="658368"/>
           </a:xfrm>
           <a:prstGeom prst="rect">
             <a:avLst/>
@@ -7034,30 +7667,56 @@
           <a:lstStyle/>
           <a:p>
             <a:pPr indent="0" marL="0">
+              <a:lnSpc>
+                <a:spcPct val="100000"/>
+              </a:lnSpc>
               <a:buNone/>
             </a:pPr>
             <a:r>
-              <a:rPr lang="en-US" sz="2400" b="1" dirty="0">
-                <a:solidFill>
-                  <a:srgbClr val="111827"/>
-                </a:solidFill>
+              <a:rPr lang="en-US" sz="2500" dirty="0">
+                <a:solidFill>
+                  <a:srgbClr val="1C3140"/>
+                </a:solidFill>
+                <a:latin typeface="Constantia" pitchFamily="34" charset="0"/>
+                <a:ea typeface="Constantia" pitchFamily="34" charset="-122"/>
+                <a:cs typeface="Constantia" pitchFamily="34" charset="-120"/>
               </a:rPr>
               <a:t>Informed consent (3/3)</a:t>
             </a:r>
-            <a:endParaRPr lang="en-US" sz="2400" dirty="0"/>
-          </a:p>
-        </p:txBody>
-      </p:sp>
-      <p:sp>
-        <p:nvSpPr>
-          <p:cNvPr id="4" name="Text 2"/>
+            <a:endParaRPr lang="en-US" sz="2500" dirty="0"/>
+          </a:p>
+        </p:txBody>
+      </p:sp>
+      <p:sp>
+        <p:nvSpPr>
+          <p:cNvPr id="4" name="Shape 2"/>
           <p:cNvSpPr/>
           <p:nvPr/>
         </p:nvSpPr>
         <p:spPr>
           <a:xfrm>
-            <a:off x="685800" y="1325880"/>
-            <a:ext cx="7772400" cy="3200400"/>
+            <a:off x="566928" y="1335024"/>
+            <a:ext cx="566928" cy="20117"/>
+          </a:xfrm>
+          <a:prstGeom prst="rect">
+            <a:avLst/>
+          </a:prstGeom>
+          <a:solidFill>
+            <a:srgbClr val="9A6A3C"/>
+          </a:solidFill>
+          <a:ln/>
+        </p:spPr>
+      </p:sp>
+      <p:sp>
+        <p:nvSpPr>
+          <p:cNvPr id="5" name="Text 3"/>
+          <p:cNvSpPr/>
+          <p:nvPr/>
+        </p:nvSpPr>
+        <p:spPr>
+          <a:xfrm>
+            <a:off x="713232" y="1664208"/>
+            <a:ext cx="7498080" cy="2788920"/>
           </a:xfrm>
           <a:prstGeom prst="rect">
             <a:avLst/>
@@ -7071,19 +7730,22 @@
           <a:p>
             <a:pPr marL="342900" indent="-342900">
               <a:lnSpc>
-                <a:spcPct val="125000"/>
+                <a:spcPct val="130000"/>
               </a:lnSpc>
               <a:spcAft>
-                <a:spcPts val="800"/>
+                <a:spcPts val="1100"/>
               </a:spcAft>
               <a:buSzPct val="100000"/>
-              <a:buChar char="•"/>
+              <a:buChar char="–"/>
             </a:pPr>
             <a:r>
               <a:rPr lang="en-US" sz="1500" dirty="0">
                 <a:solidFill>
-                  <a:srgbClr val="374151"/>
-                </a:solidFill>
+                  <a:srgbClr val="23282E"/>
+                </a:solidFill>
+                <a:latin typeface="Corbel" pitchFamily="34" charset="0"/>
+                <a:ea typeface="Corbel" pitchFamily="34" charset="-122"/>
+                <a:cs typeface="Corbel" pitchFamily="34" charset="-120"/>
               </a:rPr>
               <a:t>Waiver of consent may be granted for anonymised secondary data or minimal-risk record review, but only by the committee</a:t>
             </a:r>
@@ -7103,8 +7765,8 @@
         </p:nvSpPr>
         <p:spPr>
           <a:xfrm>
-            <a:off x="8503920" y="4709160"/>
-            <a:ext cx="800000" cy="300000"/>
+            <a:off x="566928" y="4700016"/>
+            <a:ext cx="914400" cy="274320"/>
           </a:xfrm>
           <a:prstGeom prst="rect">
             <a:avLst/>
@@ -7119,10 +7781,13 @@
           <a:bodyPr/>
           <a:lstStyle>
             <a:lvl1pPr>
-              <a:defRPr sz="1000">
-                <a:solidFill>
-                  <a:srgbClr val="6B7280"/>
-                </a:solidFill>
+              <a:defRPr sz="900">
+                <a:solidFill>
+                  <a:srgbClr val="5F6B76"/>
+                </a:solidFill>
+                <a:latin typeface="Corbel"/>
+                <a:ea typeface="Corbel"/>
+                <a:cs typeface="Corbel"/>
               </a:defRPr>
             </a:lvl1pPr>
           </a:lstStyle>
@@ -7169,8 +7834,8 @@
         </p:nvSpPr>
         <p:spPr>
           <a:xfrm>
-            <a:off x="502920" y="292608"/>
-            <a:ext cx="8046720" cy="228600"/>
+            <a:off x="566928" y="384048"/>
+            <a:ext cx="7772400" cy="237744"/>
           </a:xfrm>
           <a:prstGeom prst="rect">
             <a:avLst/>
@@ -7186,14 +7851,17 @@
               <a:buNone/>
             </a:pPr>
             <a:r>
-              <a:rPr lang="en-US" sz="1100" b="1" spc="150" kern="0" dirty="0">
-                <a:solidFill>
-                  <a:srgbClr val="00A86B"/>
-                </a:solidFill>
+              <a:rPr lang="en-US" sz="1000" spc="200" kern="0" dirty="0">
+                <a:solidFill>
+                  <a:srgbClr val="9A6A3C"/>
+                </a:solidFill>
+                <a:latin typeface="Corbel" pitchFamily="34" charset="0"/>
+                <a:ea typeface="Corbel" pitchFamily="34" charset="-122"/>
+                <a:cs typeface="Corbel" pitchFamily="34" charset="-120"/>
               </a:rPr>
               <a:t>UNIT 9</a:t>
             </a:r>
-            <a:endParaRPr lang="en-US" sz="1100" dirty="0"/>
+            <a:endParaRPr lang="en-US" sz="1000" dirty="0"/>
           </a:p>
         </p:txBody>
       </p:sp>
@@ -7205,8 +7873,8 @@
         </p:nvSpPr>
         <p:spPr>
           <a:xfrm>
-            <a:off x="502920" y="548640"/>
-            <a:ext cx="8046720" cy="548640"/>
+            <a:off x="566928" y="658368"/>
+            <a:ext cx="7772400" cy="658368"/>
           </a:xfrm>
           <a:prstGeom prst="rect">
             <a:avLst/>
@@ -7215,21 +7883,27 @@
           <a:ln/>
         </p:spPr>
         <p:txBody>
-          <a:bodyPr wrap="square" rtlCol="0" anchor="ctr"/>
+          <a:bodyPr wrap="square" rtlCol="0" anchor="t"/>
           <a:lstStyle/>
           <a:p>
             <a:pPr indent="0" marL="0">
+              <a:lnSpc>
+                <a:spcPct val="100000"/>
+              </a:lnSpc>
               <a:buNone/>
             </a:pPr>
             <a:r>
-              <a:rPr lang="en-US" sz="2400" b="1" dirty="0">
-                <a:solidFill>
-                  <a:srgbClr val="111827"/>
-                </a:solidFill>
+              <a:rPr lang="en-US" sz="2500" dirty="0">
+                <a:solidFill>
+                  <a:srgbClr val="1C3140"/>
+                </a:solidFill>
+                <a:latin typeface="Constantia" pitchFamily="34" charset="0"/>
+                <a:ea typeface="Constantia" pitchFamily="34" charset="-122"/>
+                <a:cs typeface="Constantia" pitchFamily="34" charset="-120"/>
               </a:rPr>
               <a:t>In practice</a:t>
             </a:r>
-            <a:endParaRPr lang="en-US" sz="2400" dirty="0"/>
+            <a:endParaRPr lang="en-US" sz="2500" dirty="0"/>
           </a:p>
         </p:txBody>
       </p:sp>
@@ -7241,28 +7915,48 @@
         </p:nvSpPr>
         <p:spPr>
           <a:xfrm>
-            <a:off x="502920" y="1280160"/>
-            <a:ext cx="54864" cy="2377440"/>
+            <a:off x="566928" y="1335024"/>
+            <a:ext cx="566928" cy="20117"/>
           </a:xfrm>
           <a:prstGeom prst="rect">
             <a:avLst/>
           </a:prstGeom>
           <a:solidFill>
-            <a:srgbClr val="00A86B"/>
+            <a:srgbClr val="9A6A3C"/>
           </a:solidFill>
           <a:ln/>
         </p:spPr>
       </p:sp>
       <p:sp>
         <p:nvSpPr>
-          <p:cNvPr id="5" name="Text 3"/>
+          <p:cNvPr id="5" name="Shape 3"/>
           <p:cNvSpPr/>
           <p:nvPr/>
         </p:nvSpPr>
         <p:spPr>
           <a:xfrm>
-            <a:off x="777240" y="1280160"/>
-            <a:ext cx="7589520" cy="2377440"/>
+            <a:off x="566928" y="1664208"/>
+            <a:ext cx="8010144" cy="2395728"/>
+          </a:xfrm>
+          <a:prstGeom prst="rect">
+            <a:avLst/>
+          </a:prstGeom>
+          <a:solidFill>
+            <a:srgbClr val="F6F4F0"/>
+          </a:solidFill>
+          <a:ln/>
+        </p:spPr>
+      </p:sp>
+      <p:sp>
+        <p:nvSpPr>
+          <p:cNvPr id="6" name="Text 4"/>
+          <p:cNvSpPr/>
+          <p:nvPr/>
+        </p:nvSpPr>
+        <p:spPr>
+          <a:xfrm>
+            <a:off x="932688" y="1847088"/>
+            <a:ext cx="7278624" cy="2029968"/>
           </a:xfrm>
           <a:prstGeom prst="rect">
             <a:avLst/>
@@ -7276,15 +7970,18 @@
           <a:p>
             <a:pPr indent="0" marL="0">
               <a:lnSpc>
-                <a:spcPct val="130000"/>
+                <a:spcPct val="132000"/>
               </a:lnSpc>
               <a:buNone/>
             </a:pPr>
             <a:r>
-              <a:rPr lang="en-US" sz="1600" dirty="0">
-                <a:solidFill>
-                  <a:srgbClr val="374151"/>
-                </a:solidFill>
+              <a:rPr lang="en-US" sz="1600" i="1" dirty="0">
+                <a:solidFill>
+                  <a:srgbClr val="1C3140"/>
+                </a:solidFill>
+                <a:latin typeface="Constantia" pitchFamily="34" charset="0"/>
+                <a:ea typeface="Constantia" pitchFamily="34" charset="-122"/>
+                <a:cs typeface="Constantia" pitchFamily="34" charset="-120"/>
               </a:rPr>
               <a:t>Where a clinician recruits their own patients, or a lecturer their own students, the power relationship can make refusal feel impossible. Address this explicitly in the application — usually by having someone independent take consent.</a:t>
             </a:r>
@@ -7304,8 +8001,8 @@
         </p:nvSpPr>
         <p:spPr>
           <a:xfrm>
-            <a:off x="8503920" y="4709160"/>
-            <a:ext cx="800000" cy="300000"/>
+            <a:off x="566928" y="4700016"/>
+            <a:ext cx="914400" cy="274320"/>
           </a:xfrm>
           <a:prstGeom prst="rect">
             <a:avLst/>
@@ -7320,10 +8017,13 @@
           <a:bodyPr/>
           <a:lstStyle>
             <a:lvl1pPr>
-              <a:defRPr sz="1000">
-                <a:solidFill>
-                  <a:srgbClr val="6B7280"/>
-                </a:solidFill>
+              <a:defRPr sz="900">
+                <a:solidFill>
+                  <a:srgbClr val="5F6B76"/>
+                </a:solidFill>
+                <a:latin typeface="Corbel"/>
+                <a:ea typeface="Corbel"/>
+                <a:cs typeface="Corbel"/>
               </a:defRPr>
             </a:lvl1pPr>
           </a:lstStyle>
@@ -7370,8 +8070,8 @@
         </p:nvSpPr>
         <p:spPr>
           <a:xfrm>
-            <a:off x="502920" y="292608"/>
-            <a:ext cx="8046720" cy="228600"/>
+            <a:off x="566928" y="384048"/>
+            <a:ext cx="7772400" cy="237744"/>
           </a:xfrm>
           <a:prstGeom prst="rect">
             <a:avLst/>
@@ -7387,14 +8087,17 @@
               <a:buNone/>
             </a:pPr>
             <a:r>
-              <a:rPr lang="en-US" sz="1100" b="1" spc="150" kern="0" dirty="0">
-                <a:solidFill>
-                  <a:srgbClr val="0066CC"/>
-                </a:solidFill>
+              <a:rPr lang="en-US" sz="1000" spc="200" kern="0" dirty="0">
+                <a:solidFill>
+                  <a:srgbClr val="9A6A3C"/>
+                </a:solidFill>
+                <a:latin typeface="Corbel" pitchFamily="34" charset="0"/>
+                <a:ea typeface="Corbel" pitchFamily="34" charset="-122"/>
+                <a:cs typeface="Corbel" pitchFamily="34" charset="-120"/>
               </a:rPr>
               <a:t>UNIT 9</a:t>
             </a:r>
-            <a:endParaRPr lang="en-US" sz="1100" dirty="0"/>
+            <a:endParaRPr lang="en-US" sz="1000" dirty="0"/>
           </a:p>
         </p:txBody>
       </p:sp>
@@ -7406,8 +8109,8 @@
         </p:nvSpPr>
         <p:spPr>
           <a:xfrm>
-            <a:off x="502920" y="548640"/>
-            <a:ext cx="8046720" cy="640080"/>
+            <a:off x="566928" y="658368"/>
+            <a:ext cx="7772400" cy="658368"/>
           </a:xfrm>
           <a:prstGeom prst="rect">
             <a:avLst/>
@@ -7420,30 +8123,56 @@
           <a:lstStyle/>
           <a:p>
             <a:pPr indent="0" marL="0">
+              <a:lnSpc>
+                <a:spcPct val="100000"/>
+              </a:lnSpc>
               <a:buNone/>
             </a:pPr>
             <a:r>
-              <a:rPr lang="en-US" sz="2400" b="1" dirty="0">
-                <a:solidFill>
-                  <a:srgbClr val="111827"/>
-                </a:solidFill>
+              <a:rPr lang="en-US" sz="2500" dirty="0">
+                <a:solidFill>
+                  <a:srgbClr val="1C3140"/>
+                </a:solidFill>
+                <a:latin typeface="Constantia" pitchFamily="34" charset="0"/>
+                <a:ea typeface="Constantia" pitchFamily="34" charset="-122"/>
+                <a:cs typeface="Constantia" pitchFamily="34" charset="-120"/>
               </a:rPr>
               <a:t>Review and approval (1/2)</a:t>
             </a:r>
-            <a:endParaRPr lang="en-US" sz="2400" dirty="0"/>
-          </a:p>
-        </p:txBody>
-      </p:sp>
-      <p:sp>
-        <p:nvSpPr>
-          <p:cNvPr id="4" name="Text 2"/>
+            <a:endParaRPr lang="en-US" sz="2500" dirty="0"/>
+          </a:p>
+        </p:txBody>
+      </p:sp>
+      <p:sp>
+        <p:nvSpPr>
+          <p:cNvPr id="4" name="Shape 2"/>
           <p:cNvSpPr/>
           <p:nvPr/>
         </p:nvSpPr>
         <p:spPr>
           <a:xfrm>
-            <a:off x="685800" y="1325880"/>
-            <a:ext cx="7772400" cy="3200400"/>
+            <a:off x="566928" y="1335024"/>
+            <a:ext cx="566928" cy="20117"/>
+          </a:xfrm>
+          <a:prstGeom prst="rect">
+            <a:avLst/>
+          </a:prstGeom>
+          <a:solidFill>
+            <a:srgbClr val="9A6A3C"/>
+          </a:solidFill>
+          <a:ln/>
+        </p:spPr>
+      </p:sp>
+      <p:sp>
+        <p:nvSpPr>
+          <p:cNvPr id="5" name="Text 3"/>
+          <p:cNvSpPr/>
+          <p:nvPr/>
+        </p:nvSpPr>
+        <p:spPr>
+          <a:xfrm>
+            <a:off x="713232" y="1664208"/>
+            <a:ext cx="7498080" cy="2788920"/>
           </a:xfrm>
           <a:prstGeom prst="rect">
             <a:avLst/>
@@ -7457,19 +8186,22 @@
           <a:p>
             <a:pPr marL="342900" indent="-342900">
               <a:lnSpc>
-                <a:spcPct val="125000"/>
+                <a:spcPct val="130000"/>
               </a:lnSpc>
               <a:spcAft>
-                <a:spcPts val="800"/>
+                <a:spcPts val="1100"/>
               </a:spcAft>
               <a:buSzPct val="100000"/>
-              <a:buChar char="•"/>
+              <a:buChar char="–"/>
             </a:pPr>
             <a:r>
               <a:rPr lang="en-US" sz="1500" dirty="0">
                 <a:solidFill>
-                  <a:srgbClr val="374151"/>
-                </a:solidFill>
+                  <a:srgbClr val="23282E"/>
+                </a:solidFill>
+                <a:latin typeface="Corbel" pitchFamily="34" charset="0"/>
+                <a:ea typeface="Corbel" pitchFamily="34" charset="-122"/>
+                <a:cs typeface="Corbel" pitchFamily="34" charset="-120"/>
               </a:rPr>
               <a:t>Institutional Review Boards and Research Ethics Committees review before any data are collected</a:t>
             </a:r>
@@ -7478,19 +8210,22 @@
           <a:p>
             <a:pPr marL="342900" indent="-342900">
               <a:lnSpc>
-                <a:spcPct val="125000"/>
+                <a:spcPct val="130000"/>
               </a:lnSpc>
               <a:spcAft>
-                <a:spcPts val="800"/>
+                <a:spcPts val="1100"/>
               </a:spcAft>
               <a:buSzPct val="100000"/>
-              <a:buChar char="•"/>
+              <a:buChar char="–"/>
             </a:pPr>
             <a:r>
               <a:rPr lang="en-US" sz="1500" dirty="0">
                 <a:solidFill>
-                  <a:srgbClr val="374151"/>
-                </a:solidFill>
+                  <a:srgbClr val="23282E"/>
+                </a:solidFill>
+                <a:latin typeface="Corbel" pitchFamily="34" charset="0"/>
+                <a:ea typeface="Corbel" pitchFamily="34" charset="-122"/>
+                <a:cs typeface="Corbel" pitchFamily="34" charset="-120"/>
               </a:rPr>
               <a:t>In Ghana, approvals commonly involve institutional RECs and, depending on the work, the Ghana Health Service Ethics Review Committee or the FDA</a:t>
             </a:r>
@@ -7499,19 +8234,22 @@
           <a:p>
             <a:pPr marL="342900" indent="-342900">
               <a:lnSpc>
-                <a:spcPct val="125000"/>
+                <a:spcPct val="130000"/>
               </a:lnSpc>
               <a:spcAft>
-                <a:spcPts val="800"/>
+                <a:spcPts val="1100"/>
               </a:spcAft>
               <a:buSzPct val="100000"/>
-              <a:buChar char="•"/>
+              <a:buChar char="–"/>
             </a:pPr>
             <a:r>
               <a:rPr lang="en-US" sz="1500" dirty="0">
                 <a:solidFill>
-                  <a:srgbClr val="374151"/>
-                </a:solidFill>
+                  <a:srgbClr val="23282E"/>
+                </a:solidFill>
+                <a:latin typeface="Corbel" pitchFamily="34" charset="0"/>
+                <a:ea typeface="Corbel" pitchFamily="34" charset="-122"/>
+                <a:cs typeface="Corbel" pitchFamily="34" charset="-120"/>
               </a:rPr>
               <a:t>A typical application requires the protocol, instruments, information sheet, consent form, translations, CVs and a data management plan</a:t>
             </a:r>
@@ -7531,8 +8269,8 @@
         </p:nvSpPr>
         <p:spPr>
           <a:xfrm>
-            <a:off x="8503920" y="4709160"/>
-            <a:ext cx="800000" cy="300000"/>
+            <a:off x="566928" y="4700016"/>
+            <a:ext cx="914400" cy="274320"/>
           </a:xfrm>
           <a:prstGeom prst="rect">
             <a:avLst/>
@@ -7547,10 +8285,13 @@
           <a:bodyPr/>
           <a:lstStyle>
             <a:lvl1pPr>
-              <a:defRPr sz="1000">
-                <a:solidFill>
-                  <a:srgbClr val="6B7280"/>
-                </a:solidFill>
+              <a:defRPr sz="900">
+                <a:solidFill>
+                  <a:srgbClr val="5F6B76"/>
+                </a:solidFill>
+                <a:latin typeface="Corbel"/>
+                <a:ea typeface="Corbel"/>
+                <a:cs typeface="Corbel"/>
               </a:defRPr>
             </a:lvl1pPr>
           </a:lstStyle>
@@ -7615,7 +8356,7 @@
     </a:clrScheme>
     <a:fontScheme name="Office">
       <a:majorFont>
-        <a:latin typeface="Calibri Light" panose="020F0302020204030204"/>
+        <a:latin typeface="Constantia"/>
         <a:ea typeface=""/>
         <a:cs typeface=""/>
         <a:font script="Jpan" typeface="游ゴシック Light"/>
@@ -7667,7 +8408,7 @@
         <a:font script="Tfng" typeface="Ebrima"/>
       </a:majorFont>
       <a:minorFont>
-        <a:latin typeface="Calibri" panose="020F0502020204030204"/>
+        <a:latin typeface="Corbel"/>
         <a:ea typeface=""/>
         <a:cs typeface=""/>
         <a:font script="Jpan" typeface="游ゴシック"/>
